--- a/docs/pptx/whole/ritu-linsubhr-ratio-hosp-immune-other_10pct.pptx
+++ b/docs/pptx/whole/ritu-linsubhr-ratio-hosp-immune-other_10pct.pptx
@@ -2443,7 +2443,7 @@
           </p:nvSpPr>
           <p:spPr>
             <a:xfrm>
-              <a:off x="955490" y="2073503"/>
+              <a:off x="957589" y="2073503"/>
               <a:ext cx="0" cy="3649639"/>
             </a:xfrm>
             <a:custGeom>
@@ -2486,7 +2486,7 @@
           </p:nvSpPr>
           <p:spPr>
             <a:xfrm>
-              <a:off x="1892768" y="2073503"/>
+              <a:off x="1893867" y="2073503"/>
               <a:ext cx="0" cy="3649639"/>
             </a:xfrm>
             <a:custGeom>
@@ -2529,7 +2529,7 @@
           </p:nvSpPr>
           <p:spPr>
             <a:xfrm>
-              <a:off x="2830046" y="2073503"/>
+              <a:off x="2830144" y="2073503"/>
               <a:ext cx="0" cy="3649639"/>
             </a:xfrm>
             <a:custGeom>
@@ -2572,7 +2572,7 @@
           </p:nvSpPr>
           <p:spPr>
             <a:xfrm>
-              <a:off x="3767323" y="2073503"/>
+              <a:off x="3766422" y="2073503"/>
               <a:ext cx="0" cy="3649639"/>
             </a:xfrm>
             <a:custGeom>
@@ -2615,7 +2615,7 @@
           </p:nvSpPr>
           <p:spPr>
             <a:xfrm>
-              <a:off x="4704601" y="2073503"/>
+              <a:off x="4702700" y="2073503"/>
               <a:ext cx="0" cy="3649639"/>
             </a:xfrm>
             <a:custGeom>
@@ -2658,7 +2658,7 @@
           </p:nvSpPr>
           <p:spPr>
             <a:xfrm>
-              <a:off x="5641878" y="2073503"/>
+              <a:off x="5638978" y="2073503"/>
               <a:ext cx="0" cy="3649639"/>
             </a:xfrm>
             <a:custGeom>
@@ -2701,7 +2701,7 @@
           </p:nvSpPr>
           <p:spPr>
             <a:xfrm>
-              <a:off x="6579156" y="2073503"/>
+              <a:off x="6575256" y="2073503"/>
               <a:ext cx="0" cy="3649639"/>
             </a:xfrm>
             <a:custGeom>
@@ -2744,7 +2744,7 @@
           </p:nvSpPr>
           <p:spPr>
             <a:xfrm>
-              <a:off x="7516433" y="2073503"/>
+              <a:off x="7511534" y="2073503"/>
               <a:ext cx="0" cy="3649639"/>
             </a:xfrm>
             <a:custGeom>
@@ -2787,7 +2787,7 @@
           </p:nvSpPr>
           <p:spPr>
             <a:xfrm>
-              <a:off x="8453711" y="2073503"/>
+              <a:off x="8447812" y="2073503"/>
               <a:ext cx="0" cy="3649639"/>
             </a:xfrm>
             <a:custGeom>
@@ -3045,7 +3045,7 @@
           </p:nvSpPr>
           <p:spPr>
             <a:xfrm>
-              <a:off x="1424129" y="2073503"/>
+              <a:off x="1425728" y="2073503"/>
               <a:ext cx="0" cy="3649639"/>
             </a:xfrm>
             <a:custGeom>
@@ -3088,7 +3088,7 @@
           </p:nvSpPr>
           <p:spPr>
             <a:xfrm>
-              <a:off x="2361407" y="2073503"/>
+              <a:off x="2362006" y="2073503"/>
               <a:ext cx="0" cy="3649639"/>
             </a:xfrm>
             <a:custGeom>
@@ -3131,7 +3131,7 @@
           </p:nvSpPr>
           <p:spPr>
             <a:xfrm>
-              <a:off x="3298684" y="2073503"/>
+              <a:off x="3298283" y="2073503"/>
               <a:ext cx="0" cy="3649639"/>
             </a:xfrm>
             <a:custGeom>
@@ -3174,7 +3174,7 @@
           </p:nvSpPr>
           <p:spPr>
             <a:xfrm>
-              <a:off x="4235962" y="2073503"/>
+              <a:off x="4234561" y="2073503"/>
               <a:ext cx="0" cy="3649639"/>
             </a:xfrm>
             <a:custGeom>
@@ -3217,7 +3217,7 @@
           </p:nvSpPr>
           <p:spPr>
             <a:xfrm>
-              <a:off x="5173239" y="2073503"/>
+              <a:off x="5170839" y="2073503"/>
               <a:ext cx="0" cy="3649639"/>
             </a:xfrm>
             <a:custGeom>
@@ -3260,7 +3260,7 @@
           </p:nvSpPr>
           <p:spPr>
             <a:xfrm>
-              <a:off x="6110517" y="2073503"/>
+              <a:off x="6107117" y="2073503"/>
               <a:ext cx="0" cy="3649639"/>
             </a:xfrm>
             <a:custGeom>
@@ -3303,7 +3303,7 @@
           </p:nvSpPr>
           <p:spPr>
             <a:xfrm>
-              <a:off x="7047795" y="2073503"/>
+              <a:off x="7043395" y="2073503"/>
               <a:ext cx="0" cy="3649639"/>
             </a:xfrm>
             <a:custGeom>
@@ -3346,7 +3346,7 @@
           </p:nvSpPr>
           <p:spPr>
             <a:xfrm>
-              <a:off x="7985072" y="2073503"/>
+              <a:off x="7979673" y="2073503"/>
               <a:ext cx="0" cy="3649639"/>
             </a:xfrm>
             <a:custGeom>
@@ -3390,521 +3390,521 @@
           <p:spPr>
             <a:xfrm>
               <a:off x="1172049" y="2073503"/>
-              <a:ext cx="7090630" cy="3481731"/>
+              <a:ext cx="7090630" cy="3481739"/>
             </a:xfrm>
             <a:custGeom>
               <a:avLst/>
               <a:pathLst>
-                <a:path w="7090630" h="3481731">
+                <a:path w="7090630" h="3481739">
                   <a:moveTo>
-                    <a:pt x="2201020" y="0"/>
+                    <a:pt x="2201929" y="0"/>
                   </a:moveTo>
                   <a:lnTo>
-                    <a:pt x="2220298" y="104923"/>
-                  </a:lnTo>
-                  <a:lnTo>
-                    <a:pt x="2291920" y="454414"/>
-                  </a:lnTo>
-                  <a:lnTo>
-                    <a:pt x="2363543" y="767756"/>
-                  </a:lnTo>
-                  <a:lnTo>
-                    <a:pt x="2435165" y="1048687"/>
-                  </a:lnTo>
-                  <a:lnTo>
-                    <a:pt x="2506788" y="1300559"/>
-                  </a:lnTo>
-                  <a:lnTo>
-                    <a:pt x="2578410" y="1526379"/>
-                  </a:lnTo>
-                  <a:lnTo>
-                    <a:pt x="2650033" y="1728841"/>
-                  </a:lnTo>
-                  <a:lnTo>
-                    <a:pt x="2721655" y="1910361"/>
-                  </a:lnTo>
-                  <a:lnTo>
-                    <a:pt x="2793278" y="2073106"/>
-                  </a:lnTo>
-                  <a:lnTo>
-                    <a:pt x="2864901" y="2219017"/>
-                  </a:lnTo>
-                  <a:lnTo>
-                    <a:pt x="2936523" y="2349835"/>
-                  </a:lnTo>
-                  <a:lnTo>
-                    <a:pt x="3008146" y="2467122"/>
-                  </a:lnTo>
-                  <a:lnTo>
-                    <a:pt x="3079768" y="2572277"/>
-                  </a:lnTo>
-                  <a:lnTo>
-                    <a:pt x="3151391" y="2656712"/>
-                  </a:lnTo>
-                  <a:lnTo>
-                    <a:pt x="3223013" y="2674286"/>
-                  </a:lnTo>
-                  <a:lnTo>
-                    <a:pt x="3294636" y="2691487"/>
-                  </a:lnTo>
-                  <a:lnTo>
-                    <a:pt x="3366258" y="2708322"/>
-                  </a:lnTo>
-                  <a:lnTo>
-                    <a:pt x="3437881" y="2724799"/>
-                  </a:lnTo>
-                  <a:lnTo>
-                    <a:pt x="3509503" y="2740927"/>
-                  </a:lnTo>
-                  <a:lnTo>
-                    <a:pt x="3581126" y="2756711"/>
-                  </a:lnTo>
-                  <a:lnTo>
-                    <a:pt x="3652748" y="2772161"/>
-                  </a:lnTo>
-                  <a:lnTo>
-                    <a:pt x="3724371" y="2787282"/>
-                  </a:lnTo>
-                  <a:lnTo>
-                    <a:pt x="3795993" y="2802081"/>
-                  </a:lnTo>
-                  <a:lnTo>
-                    <a:pt x="3867616" y="2816566"/>
-                  </a:lnTo>
-                  <a:lnTo>
-                    <a:pt x="3939238" y="2830744"/>
-                  </a:lnTo>
-                  <a:lnTo>
-                    <a:pt x="4010861" y="2844620"/>
-                  </a:lnTo>
-                  <a:lnTo>
-                    <a:pt x="4082483" y="2858201"/>
-                  </a:lnTo>
-                  <a:lnTo>
-                    <a:pt x="4154106" y="2871494"/>
-                  </a:lnTo>
-                  <a:lnTo>
-                    <a:pt x="4225729" y="2884504"/>
-                  </a:lnTo>
-                  <a:lnTo>
-                    <a:pt x="4297351" y="2897238"/>
-                  </a:lnTo>
-                  <a:lnTo>
-                    <a:pt x="4368974" y="2909701"/>
-                  </a:lnTo>
-                  <a:lnTo>
-                    <a:pt x="4440596" y="2921899"/>
-                  </a:lnTo>
-                  <a:lnTo>
-                    <a:pt x="4512219" y="2933838"/>
-                  </a:lnTo>
-                  <a:lnTo>
-                    <a:pt x="4583841" y="2945523"/>
-                  </a:lnTo>
-                  <a:lnTo>
-                    <a:pt x="4655464" y="2956961"/>
-                  </a:lnTo>
-                  <a:lnTo>
-                    <a:pt x="4727086" y="2968155"/>
-                  </a:lnTo>
-                  <a:lnTo>
-                    <a:pt x="4798709" y="2979111"/>
-                  </a:lnTo>
-                  <a:lnTo>
-                    <a:pt x="4870331" y="2989834"/>
-                  </a:lnTo>
-                  <a:lnTo>
-                    <a:pt x="4941954" y="3000330"/>
-                  </a:lnTo>
-                  <a:lnTo>
-                    <a:pt x="5013576" y="3010602"/>
-                  </a:lnTo>
-                  <a:lnTo>
-                    <a:pt x="5085199" y="3020656"/>
-                  </a:lnTo>
-                  <a:lnTo>
-                    <a:pt x="5156821" y="3030497"/>
-                  </a:lnTo>
-                  <a:lnTo>
-                    <a:pt x="5228444" y="3040128"/>
-                  </a:lnTo>
-                  <a:lnTo>
-                    <a:pt x="5300066" y="3049555"/>
-                  </a:lnTo>
-                  <a:lnTo>
-                    <a:pt x="5371689" y="3058781"/>
-                  </a:lnTo>
-                  <a:lnTo>
-                    <a:pt x="5443311" y="3067812"/>
-                  </a:lnTo>
-                  <a:lnTo>
-                    <a:pt x="5514934" y="3076650"/>
-                  </a:lnTo>
-                  <a:lnTo>
-                    <a:pt x="5586557" y="3085301"/>
-                  </a:lnTo>
-                  <a:lnTo>
-                    <a:pt x="5658179" y="3093768"/>
-                  </a:lnTo>
-                  <a:lnTo>
-                    <a:pt x="5729802" y="3102055"/>
-                  </a:lnTo>
-                  <a:lnTo>
-                    <a:pt x="5801424" y="3110165"/>
-                  </a:lnTo>
-                  <a:lnTo>
-                    <a:pt x="5873047" y="3118104"/>
-                  </a:lnTo>
-                  <a:lnTo>
-                    <a:pt x="5944669" y="3125874"/>
-                  </a:lnTo>
-                  <a:lnTo>
-                    <a:pt x="6016292" y="3133478"/>
-                  </a:lnTo>
-                  <a:lnTo>
-                    <a:pt x="6087914" y="3140921"/>
-                  </a:lnTo>
-                  <a:lnTo>
-                    <a:pt x="6159537" y="3148206"/>
-                  </a:lnTo>
-                  <a:lnTo>
-                    <a:pt x="6231159" y="3155336"/>
-                  </a:lnTo>
-                  <a:lnTo>
-                    <a:pt x="6302782" y="3162315"/>
-                  </a:lnTo>
-                  <a:lnTo>
-                    <a:pt x="6374404" y="3169145"/>
-                  </a:lnTo>
-                  <a:lnTo>
-                    <a:pt x="6446027" y="3175830"/>
-                  </a:lnTo>
-                  <a:lnTo>
-                    <a:pt x="6517649" y="3182374"/>
-                  </a:lnTo>
-                  <a:lnTo>
-                    <a:pt x="6589272" y="3188778"/>
-                  </a:lnTo>
-                  <a:lnTo>
-                    <a:pt x="6660894" y="3195046"/>
-                  </a:lnTo>
-                  <a:lnTo>
-                    <a:pt x="6732517" y="3201180"/>
-                  </a:lnTo>
-                  <a:lnTo>
-                    <a:pt x="6804139" y="3207185"/>
-                  </a:lnTo>
-                  <a:lnTo>
-                    <a:pt x="6875762" y="3213062"/>
-                  </a:lnTo>
-                  <a:lnTo>
-                    <a:pt x="6947385" y="3218814"/>
-                  </a:lnTo>
-                  <a:lnTo>
-                    <a:pt x="7019007" y="3224443"/>
-                  </a:lnTo>
-                  <a:lnTo>
-                    <a:pt x="7090630" y="3229954"/>
-                  </a:lnTo>
-                  <a:lnTo>
-                    <a:pt x="7090630" y="3481731"/>
-                  </a:lnTo>
-                  <a:lnTo>
-                    <a:pt x="7019007" y="3481499"/>
-                  </a:lnTo>
-                  <a:lnTo>
-                    <a:pt x="6947385" y="3481240"/>
-                  </a:lnTo>
-                  <a:lnTo>
-                    <a:pt x="6875762" y="3480950"/>
-                  </a:lnTo>
-                  <a:lnTo>
-                    <a:pt x="6804139" y="3480628"/>
-                  </a:lnTo>
-                  <a:lnTo>
-                    <a:pt x="6732517" y="3480268"/>
-                  </a:lnTo>
-                  <a:lnTo>
-                    <a:pt x="6660894" y="3479867"/>
-                  </a:lnTo>
-                  <a:lnTo>
-                    <a:pt x="6589272" y="3479419"/>
-                  </a:lnTo>
-                  <a:lnTo>
-                    <a:pt x="6517649" y="3478920"/>
-                  </a:lnTo>
-                  <a:lnTo>
-                    <a:pt x="6446027" y="3478363"/>
-                  </a:lnTo>
-                  <a:lnTo>
-                    <a:pt x="6374404" y="3477742"/>
-                  </a:lnTo>
-                  <a:lnTo>
-                    <a:pt x="6302782" y="3477049"/>
-                  </a:lnTo>
-                  <a:lnTo>
-                    <a:pt x="6231159" y="3476276"/>
-                  </a:lnTo>
-                  <a:lnTo>
-                    <a:pt x="6159537" y="3475415"/>
-                  </a:lnTo>
-                  <a:lnTo>
-                    <a:pt x="6087914" y="3474453"/>
-                  </a:lnTo>
-                  <a:lnTo>
-                    <a:pt x="6016292" y="3473381"/>
-                  </a:lnTo>
-                  <a:lnTo>
-                    <a:pt x="5944669" y="3472185"/>
-                  </a:lnTo>
-                  <a:lnTo>
-                    <a:pt x="5873047" y="3470852"/>
-                  </a:lnTo>
-                  <a:lnTo>
-                    <a:pt x="5801424" y="3469364"/>
-                  </a:lnTo>
-                  <a:lnTo>
-                    <a:pt x="5729802" y="3467705"/>
-                  </a:lnTo>
-                  <a:lnTo>
-                    <a:pt x="5658179" y="3465854"/>
-                  </a:lnTo>
-                  <a:lnTo>
-                    <a:pt x="5586557" y="3463790"/>
-                  </a:lnTo>
-                  <a:lnTo>
-                    <a:pt x="5514934" y="3461487"/>
-                  </a:lnTo>
-                  <a:lnTo>
-                    <a:pt x="5443311" y="3458919"/>
-                  </a:lnTo>
-                  <a:lnTo>
-                    <a:pt x="5371689" y="3456055"/>
-                  </a:lnTo>
-                  <a:lnTo>
-                    <a:pt x="5300066" y="3452860"/>
-                  </a:lnTo>
-                  <a:lnTo>
-                    <a:pt x="5228444" y="3449297"/>
-                  </a:lnTo>
-                  <a:lnTo>
-                    <a:pt x="5156821" y="3445323"/>
-                  </a:lnTo>
-                  <a:lnTo>
-                    <a:pt x="5085199" y="3440890"/>
-                  </a:lnTo>
-                  <a:lnTo>
-                    <a:pt x="5013576" y="3435945"/>
-                  </a:lnTo>
-                  <a:lnTo>
-                    <a:pt x="4941954" y="3430430"/>
-                  </a:lnTo>
-                  <a:lnTo>
-                    <a:pt x="4870331" y="3424279"/>
-                  </a:lnTo>
-                  <a:lnTo>
-                    <a:pt x="4798709" y="3417419"/>
-                  </a:lnTo>
-                  <a:lnTo>
-                    <a:pt x="4727086" y="3409767"/>
-                  </a:lnTo>
-                  <a:lnTo>
-                    <a:pt x="4655464" y="3401232"/>
-                  </a:lnTo>
-                  <a:lnTo>
-                    <a:pt x="4583841" y="3391712"/>
-                  </a:lnTo>
-                  <a:lnTo>
-                    <a:pt x="4512219" y="3381094"/>
-                  </a:lnTo>
-                  <a:lnTo>
-                    <a:pt x="4440596" y="3369251"/>
-                  </a:lnTo>
-                  <a:lnTo>
-                    <a:pt x="4368974" y="3356042"/>
-                  </a:lnTo>
-                  <a:lnTo>
-                    <a:pt x="4297351" y="3341309"/>
-                  </a:lnTo>
-                  <a:lnTo>
-                    <a:pt x="4225729" y="3324876"/>
-                  </a:lnTo>
-                  <a:lnTo>
-                    <a:pt x="4154106" y="3306547"/>
-                  </a:lnTo>
-                  <a:lnTo>
-                    <a:pt x="4082483" y="3286104"/>
-                  </a:lnTo>
-                  <a:lnTo>
-                    <a:pt x="4010861" y="3263302"/>
-                  </a:lnTo>
-                  <a:lnTo>
-                    <a:pt x="3939238" y="3237869"/>
-                  </a:lnTo>
-                  <a:lnTo>
-                    <a:pt x="3867616" y="3209503"/>
-                  </a:lnTo>
-                  <a:lnTo>
-                    <a:pt x="3795993" y="3177863"/>
-                  </a:lnTo>
-                  <a:lnTo>
-                    <a:pt x="3724371" y="3142574"/>
-                  </a:lnTo>
-                  <a:lnTo>
-                    <a:pt x="3652748" y="3103213"/>
-                  </a:lnTo>
-                  <a:lnTo>
-                    <a:pt x="3581126" y="3059311"/>
-                  </a:lnTo>
-                  <a:lnTo>
-                    <a:pt x="3509503" y="3010344"/>
-                  </a:lnTo>
-                  <a:lnTo>
-                    <a:pt x="3437881" y="2955728"/>
-                  </a:lnTo>
-                  <a:lnTo>
-                    <a:pt x="3366258" y="2894811"/>
-                  </a:lnTo>
-                  <a:lnTo>
-                    <a:pt x="3294636" y="2826867"/>
-                  </a:lnTo>
-                  <a:lnTo>
-                    <a:pt x="3223013" y="2751083"/>
-                  </a:lnTo>
-                  <a:lnTo>
-                    <a:pt x="3151391" y="2666556"/>
-                  </a:lnTo>
-                  <a:lnTo>
-                    <a:pt x="3079768" y="2638756"/>
-                  </a:lnTo>
-                  <a:lnTo>
-                    <a:pt x="3008146" y="2620410"/>
-                  </a:lnTo>
-                  <a:lnTo>
-                    <a:pt x="2936523" y="2601666"/>
-                  </a:lnTo>
-                  <a:lnTo>
-                    <a:pt x="2864901" y="2582516"/>
-                  </a:lnTo>
-                  <a:lnTo>
-                    <a:pt x="2793278" y="2562949"/>
-                  </a:lnTo>
-                  <a:lnTo>
-                    <a:pt x="2721655" y="2542957"/>
-                  </a:lnTo>
-                  <a:lnTo>
-                    <a:pt x="2650033" y="2522532"/>
-                  </a:lnTo>
-                  <a:lnTo>
-                    <a:pt x="2578410" y="2501663"/>
-                  </a:lnTo>
-                  <a:lnTo>
-                    <a:pt x="2506788" y="2480341"/>
-                  </a:lnTo>
-                  <a:lnTo>
-                    <a:pt x="2435165" y="2458556"/>
-                  </a:lnTo>
-                  <a:lnTo>
-                    <a:pt x="2363543" y="2436298"/>
-                  </a:lnTo>
-                  <a:lnTo>
-                    <a:pt x="2291920" y="2413557"/>
-                  </a:lnTo>
-                  <a:lnTo>
-                    <a:pt x="2220298" y="2390322"/>
-                  </a:lnTo>
-                  <a:lnTo>
-                    <a:pt x="2148675" y="2366583"/>
-                  </a:lnTo>
-                  <a:lnTo>
-                    <a:pt x="2077053" y="2342328"/>
-                  </a:lnTo>
-                  <a:lnTo>
-                    <a:pt x="2005430" y="2317547"/>
-                  </a:lnTo>
-                  <a:lnTo>
-                    <a:pt x="1933808" y="2292227"/>
-                  </a:lnTo>
-                  <a:lnTo>
-                    <a:pt x="1862185" y="2266358"/>
-                  </a:lnTo>
-                  <a:lnTo>
-                    <a:pt x="1790563" y="2239927"/>
-                  </a:lnTo>
-                  <a:lnTo>
-                    <a:pt x="1718940" y="2212923"/>
-                  </a:lnTo>
-                  <a:lnTo>
-                    <a:pt x="1647318" y="2185332"/>
-                  </a:lnTo>
-                  <a:lnTo>
-                    <a:pt x="1575695" y="2157142"/>
-                  </a:lnTo>
-                  <a:lnTo>
-                    <a:pt x="1504073" y="2128340"/>
-                  </a:lnTo>
-                  <a:lnTo>
-                    <a:pt x="1432450" y="2098913"/>
-                  </a:lnTo>
-                  <a:lnTo>
-                    <a:pt x="1360827" y="2068847"/>
-                  </a:lnTo>
-                  <a:lnTo>
-                    <a:pt x="1289205" y="2038128"/>
-                  </a:lnTo>
-                  <a:lnTo>
-                    <a:pt x="1217582" y="2006742"/>
-                  </a:lnTo>
-                  <a:lnTo>
-                    <a:pt x="1145960" y="1974675"/>
-                  </a:lnTo>
-                  <a:lnTo>
-                    <a:pt x="1074337" y="1941911"/>
-                  </a:lnTo>
-                  <a:lnTo>
-                    <a:pt x="1002715" y="1908436"/>
-                  </a:lnTo>
-                  <a:lnTo>
-                    <a:pt x="931092" y="1874235"/>
-                  </a:lnTo>
-                  <a:lnTo>
-                    <a:pt x="859470" y="1839290"/>
-                  </a:lnTo>
-                  <a:lnTo>
-                    <a:pt x="787847" y="1803588"/>
-                  </a:lnTo>
-                  <a:lnTo>
-                    <a:pt x="716225" y="1767110"/>
-                  </a:lnTo>
-                  <a:lnTo>
-                    <a:pt x="644602" y="1729840"/>
-                  </a:lnTo>
-                  <a:lnTo>
-                    <a:pt x="572980" y="1691761"/>
-                  </a:lnTo>
-                  <a:lnTo>
-                    <a:pt x="501357" y="1652855"/>
-                  </a:lnTo>
-                  <a:lnTo>
-                    <a:pt x="429735" y="1613104"/>
-                  </a:lnTo>
-                  <a:lnTo>
-                    <a:pt x="358112" y="1572491"/>
-                  </a:lnTo>
-                  <a:lnTo>
-                    <a:pt x="286490" y="1530995"/>
-                  </a:lnTo>
-                  <a:lnTo>
-                    <a:pt x="214867" y="1488599"/>
-                  </a:lnTo>
-                  <a:lnTo>
-                    <a:pt x="143245" y="1445283"/>
-                  </a:lnTo>
-                  <a:lnTo>
-                    <a:pt x="71622" y="1401025"/>
-                  </a:lnTo>
-                  <a:lnTo>
-                    <a:pt x="0" y="1355807"/>
+                    <a:pt x="2220298" y="100190"/>
+                  </a:lnTo>
+                  <a:lnTo>
+                    <a:pt x="2291920" y="450410"/>
+                  </a:lnTo>
+                  <a:lnTo>
+                    <a:pt x="2363543" y="764380"/>
+                  </a:lnTo>
+                  <a:lnTo>
+                    <a:pt x="2435165" y="1045852"/>
+                  </a:lnTo>
+                  <a:lnTo>
+                    <a:pt x="2506788" y="1298190"/>
+                  </a:lnTo>
+                  <a:lnTo>
+                    <a:pt x="2578410" y="1524410"/>
+                  </a:lnTo>
+                  <a:lnTo>
+                    <a:pt x="2650033" y="1727214"/>
+                  </a:lnTo>
+                  <a:lnTo>
+                    <a:pt x="2721655" y="1909026"/>
+                  </a:lnTo>
+                  <a:lnTo>
+                    <a:pt x="2793278" y="2072020"/>
+                  </a:lnTo>
+                  <a:lnTo>
+                    <a:pt x="2864901" y="2218143"/>
+                  </a:lnTo>
+                  <a:lnTo>
+                    <a:pt x="2936523" y="2349141"/>
+                  </a:lnTo>
+                  <a:lnTo>
+                    <a:pt x="3008146" y="2466580"/>
+                  </a:lnTo>
+                  <a:lnTo>
+                    <a:pt x="3079768" y="2571864"/>
+                  </a:lnTo>
+                  <a:lnTo>
+                    <a:pt x="3151391" y="2656673"/>
+                  </a:lnTo>
+                  <a:lnTo>
+                    <a:pt x="3223013" y="2674425"/>
+                  </a:lnTo>
+                  <a:lnTo>
+                    <a:pt x="3294636" y="2691796"/>
+                  </a:lnTo>
+                  <a:lnTo>
+                    <a:pt x="3366258" y="2708794"/>
+                  </a:lnTo>
+                  <a:lnTo>
+                    <a:pt x="3437881" y="2725427"/>
+                  </a:lnTo>
+                  <a:lnTo>
+                    <a:pt x="3509503" y="2741704"/>
+                  </a:lnTo>
+                  <a:lnTo>
+                    <a:pt x="3581126" y="2757631"/>
+                  </a:lnTo>
+                  <a:lnTo>
+                    <a:pt x="3652748" y="2773216"/>
+                  </a:lnTo>
+                  <a:lnTo>
+                    <a:pt x="3724371" y="2788466"/>
+                  </a:lnTo>
+                  <a:lnTo>
+                    <a:pt x="3795993" y="2803389"/>
+                  </a:lnTo>
+                  <a:lnTo>
+                    <a:pt x="3867616" y="2817992"/>
+                  </a:lnTo>
+                  <a:lnTo>
+                    <a:pt x="3939238" y="2832282"/>
+                  </a:lnTo>
+                  <a:lnTo>
+                    <a:pt x="4010861" y="2846265"/>
+                  </a:lnTo>
+                  <a:lnTo>
+                    <a:pt x="4082483" y="2859947"/>
+                  </a:lnTo>
+                  <a:lnTo>
+                    <a:pt x="4154106" y="2873336"/>
+                  </a:lnTo>
+                  <a:lnTo>
+                    <a:pt x="4225729" y="2886438"/>
+                  </a:lnTo>
+                  <a:lnTo>
+                    <a:pt x="4297351" y="2899258"/>
+                  </a:lnTo>
+                  <a:lnTo>
+                    <a:pt x="4368974" y="2911803"/>
+                  </a:lnTo>
+                  <a:lnTo>
+                    <a:pt x="4440596" y="2924079"/>
+                  </a:lnTo>
+                  <a:lnTo>
+                    <a:pt x="4512219" y="2936092"/>
+                  </a:lnTo>
+                  <a:lnTo>
+                    <a:pt x="4583841" y="2947846"/>
+                  </a:lnTo>
+                  <a:lnTo>
+                    <a:pt x="4655464" y="2959349"/>
+                  </a:lnTo>
+                  <a:lnTo>
+                    <a:pt x="4727086" y="2970604"/>
+                  </a:lnTo>
+                  <a:lnTo>
+                    <a:pt x="4798709" y="2981618"/>
+                  </a:lnTo>
+                  <a:lnTo>
+                    <a:pt x="4870331" y="2992396"/>
+                  </a:lnTo>
+                  <a:lnTo>
+                    <a:pt x="4941954" y="3002942"/>
+                  </a:lnTo>
+                  <a:lnTo>
+                    <a:pt x="5013576" y="3013262"/>
+                  </a:lnTo>
+                  <a:lnTo>
+                    <a:pt x="5085199" y="3023360"/>
+                  </a:lnTo>
+                  <a:lnTo>
+                    <a:pt x="5156821" y="3033241"/>
+                  </a:lnTo>
+                  <a:lnTo>
+                    <a:pt x="5228444" y="3042911"/>
+                  </a:lnTo>
+                  <a:lnTo>
+                    <a:pt x="5300066" y="3052373"/>
+                  </a:lnTo>
+                  <a:lnTo>
+                    <a:pt x="5371689" y="3061632"/>
+                  </a:lnTo>
+                  <a:lnTo>
+                    <a:pt x="5443311" y="3070692"/>
+                  </a:lnTo>
+                  <a:lnTo>
+                    <a:pt x="5514934" y="3079557"/>
+                  </a:lnTo>
+                  <a:lnTo>
+                    <a:pt x="5586557" y="3088233"/>
+                  </a:lnTo>
+                  <a:lnTo>
+                    <a:pt x="5658179" y="3096722"/>
+                  </a:lnTo>
+                  <a:lnTo>
+                    <a:pt x="5729802" y="3105029"/>
+                  </a:lnTo>
+                  <a:lnTo>
+                    <a:pt x="5801424" y="3113158"/>
+                  </a:lnTo>
+                  <a:lnTo>
+                    <a:pt x="5873047" y="3121112"/>
+                  </a:lnTo>
+                  <a:lnTo>
+                    <a:pt x="5944669" y="3128895"/>
+                  </a:lnTo>
+                  <a:lnTo>
+                    <a:pt x="6016292" y="3136512"/>
+                  </a:lnTo>
+                  <a:lnTo>
+                    <a:pt x="6087914" y="3143964"/>
+                  </a:lnTo>
+                  <a:lnTo>
+                    <a:pt x="6159537" y="3151257"/>
+                  </a:lnTo>
+                  <a:lnTo>
+                    <a:pt x="6231159" y="3158394"/>
+                  </a:lnTo>
+                  <a:lnTo>
+                    <a:pt x="6302782" y="3165377"/>
+                  </a:lnTo>
+                  <a:lnTo>
+                    <a:pt x="6374404" y="3172210"/>
+                  </a:lnTo>
+                  <a:lnTo>
+                    <a:pt x="6446027" y="3178897"/>
+                  </a:lnTo>
+                  <a:lnTo>
+                    <a:pt x="6517649" y="3185440"/>
+                  </a:lnTo>
+                  <a:lnTo>
+                    <a:pt x="6589272" y="3191843"/>
+                  </a:lnTo>
+                  <a:lnTo>
+                    <a:pt x="6660894" y="3198108"/>
+                  </a:lnTo>
+                  <a:lnTo>
+                    <a:pt x="6732517" y="3204239"/>
+                  </a:lnTo>
+                  <a:lnTo>
+                    <a:pt x="6804139" y="3210238"/>
+                  </a:lnTo>
+                  <a:lnTo>
+                    <a:pt x="6875762" y="3216109"/>
+                  </a:lnTo>
+                  <a:lnTo>
+                    <a:pt x="6947385" y="3221853"/>
+                  </a:lnTo>
+                  <a:lnTo>
+                    <a:pt x="7019007" y="3227474"/>
+                  </a:lnTo>
+                  <a:lnTo>
+                    <a:pt x="7090630" y="3232975"/>
+                  </a:lnTo>
+                  <a:lnTo>
+                    <a:pt x="7090630" y="3481739"/>
+                  </a:lnTo>
+                  <a:lnTo>
+                    <a:pt x="7019007" y="3481508"/>
+                  </a:lnTo>
+                  <a:lnTo>
+                    <a:pt x="6947385" y="3481249"/>
+                  </a:lnTo>
+                  <a:lnTo>
+                    <a:pt x="6875762" y="3480961"/>
+                  </a:lnTo>
+                  <a:lnTo>
+                    <a:pt x="6804139" y="3480639"/>
+                  </a:lnTo>
+                  <a:lnTo>
+                    <a:pt x="6732517" y="3480280"/>
+                  </a:lnTo>
+                  <a:lnTo>
+                    <a:pt x="6660894" y="3479880"/>
+                  </a:lnTo>
+                  <a:lnTo>
+                    <a:pt x="6589272" y="3479434"/>
+                  </a:lnTo>
+                  <a:lnTo>
+                    <a:pt x="6517649" y="3478936"/>
+                  </a:lnTo>
+                  <a:lnTo>
+                    <a:pt x="6446027" y="3478380"/>
+                  </a:lnTo>
+                  <a:lnTo>
+                    <a:pt x="6374404" y="3477761"/>
+                  </a:lnTo>
+                  <a:lnTo>
+                    <a:pt x="6302782" y="3477070"/>
+                  </a:lnTo>
+                  <a:lnTo>
+                    <a:pt x="6231159" y="3476299"/>
+                  </a:lnTo>
+                  <a:lnTo>
+                    <a:pt x="6159537" y="3475439"/>
+                  </a:lnTo>
+                  <a:lnTo>
+                    <a:pt x="6087914" y="3474480"/>
+                  </a:lnTo>
+                  <a:lnTo>
+                    <a:pt x="6016292" y="3473410"/>
+                  </a:lnTo>
+                  <a:lnTo>
+                    <a:pt x="5944669" y="3472217"/>
+                  </a:lnTo>
+                  <a:lnTo>
+                    <a:pt x="5873047" y="3470885"/>
+                  </a:lnTo>
+                  <a:lnTo>
+                    <a:pt x="5801424" y="3469400"/>
+                  </a:lnTo>
+                  <a:lnTo>
+                    <a:pt x="5729802" y="3467744"/>
+                  </a:lnTo>
+                  <a:lnTo>
+                    <a:pt x="5658179" y="3465897"/>
+                  </a:lnTo>
+                  <a:lnTo>
+                    <a:pt x="5586557" y="3463836"/>
+                  </a:lnTo>
+                  <a:lnTo>
+                    <a:pt x="5514934" y="3461537"/>
+                  </a:lnTo>
+                  <a:lnTo>
+                    <a:pt x="5443311" y="3458973"/>
+                  </a:lnTo>
+                  <a:lnTo>
+                    <a:pt x="5371689" y="3456112"/>
+                  </a:lnTo>
+                  <a:lnTo>
+                    <a:pt x="5300066" y="3452922"/>
+                  </a:lnTo>
+                  <a:lnTo>
+                    <a:pt x="5228444" y="3449363"/>
+                  </a:lnTo>
+                  <a:lnTo>
+                    <a:pt x="5156821" y="3445393"/>
+                  </a:lnTo>
+                  <a:lnTo>
+                    <a:pt x="5085199" y="3440965"/>
+                  </a:lnTo>
+                  <a:lnTo>
+                    <a:pt x="5013576" y="3436025"/>
+                  </a:lnTo>
+                  <a:lnTo>
+                    <a:pt x="4941954" y="3430515"/>
+                  </a:lnTo>
+                  <a:lnTo>
+                    <a:pt x="4870331" y="3424370"/>
+                  </a:lnTo>
+                  <a:lnTo>
+                    <a:pt x="4798709" y="3417514"/>
+                  </a:lnTo>
+                  <a:lnTo>
+                    <a:pt x="4727086" y="3409867"/>
+                  </a:lnTo>
+                  <a:lnTo>
+                    <a:pt x="4655464" y="3401337"/>
+                  </a:lnTo>
+                  <a:lnTo>
+                    <a:pt x="4583841" y="3391822"/>
+                  </a:lnTo>
+                  <a:lnTo>
+                    <a:pt x="4512219" y="3381209"/>
+                  </a:lnTo>
+                  <a:lnTo>
+                    <a:pt x="4440596" y="3369371"/>
+                  </a:lnTo>
+                  <a:lnTo>
+                    <a:pt x="4368974" y="3356165"/>
+                  </a:lnTo>
+                  <a:lnTo>
+                    <a:pt x="4297351" y="3341435"/>
+                  </a:lnTo>
+                  <a:lnTo>
+                    <a:pt x="4225729" y="3325004"/>
+                  </a:lnTo>
+                  <a:lnTo>
+                    <a:pt x="4154106" y="3306676"/>
+                  </a:lnTo>
+                  <a:lnTo>
+                    <a:pt x="4082483" y="3286232"/>
+                  </a:lnTo>
+                  <a:lnTo>
+                    <a:pt x="4010861" y="3263428"/>
+                  </a:lnTo>
+                  <a:lnTo>
+                    <a:pt x="3939238" y="3237990"/>
+                  </a:lnTo>
+                  <a:lnTo>
+                    <a:pt x="3867616" y="3209616"/>
+                  </a:lnTo>
+                  <a:lnTo>
+                    <a:pt x="3795993" y="3177966"/>
+                  </a:lnTo>
+                  <a:lnTo>
+                    <a:pt x="3724371" y="3142661"/>
+                  </a:lnTo>
+                  <a:lnTo>
+                    <a:pt x="3652748" y="3103280"/>
+                  </a:lnTo>
+                  <a:lnTo>
+                    <a:pt x="3581126" y="3059353"/>
+                  </a:lnTo>
+                  <a:lnTo>
+                    <a:pt x="3509503" y="3010353"/>
+                  </a:lnTo>
+                  <a:lnTo>
+                    <a:pt x="3437881" y="2955697"/>
+                  </a:lnTo>
+                  <a:lnTo>
+                    <a:pt x="3366258" y="2894730"/>
+                  </a:lnTo>
+                  <a:lnTo>
+                    <a:pt x="3294636" y="2826724"/>
+                  </a:lnTo>
+                  <a:lnTo>
+                    <a:pt x="3223013" y="2750866"/>
+                  </a:lnTo>
+                  <a:lnTo>
+                    <a:pt x="3151391" y="2666249"/>
+                  </a:lnTo>
+                  <a:lnTo>
+                    <a:pt x="3079768" y="2638532"/>
+                  </a:lnTo>
+                  <a:lnTo>
+                    <a:pt x="3008146" y="2619992"/>
+                  </a:lnTo>
+                  <a:lnTo>
+                    <a:pt x="2936523" y="2601046"/>
+                  </a:lnTo>
+                  <a:lnTo>
+                    <a:pt x="2864901" y="2581685"/>
+                  </a:lnTo>
+                  <a:lnTo>
+                    <a:pt x="2793278" y="2561899"/>
+                  </a:lnTo>
+                  <a:lnTo>
+                    <a:pt x="2721655" y="2541679"/>
+                  </a:lnTo>
+                  <a:lnTo>
+                    <a:pt x="2650033" y="2521015"/>
+                  </a:lnTo>
+                  <a:lnTo>
+                    <a:pt x="2578410" y="2499898"/>
+                  </a:lnTo>
+                  <a:lnTo>
+                    <a:pt x="2506788" y="2478318"/>
+                  </a:lnTo>
+                  <a:lnTo>
+                    <a:pt x="2435165" y="2456264"/>
+                  </a:lnTo>
+                  <a:lnTo>
+                    <a:pt x="2363543" y="2433727"/>
+                  </a:lnTo>
+                  <a:lnTo>
+                    <a:pt x="2291920" y="2410696"/>
+                  </a:lnTo>
+                  <a:lnTo>
+                    <a:pt x="2220298" y="2387159"/>
+                  </a:lnTo>
+                  <a:lnTo>
+                    <a:pt x="2148675" y="2363106"/>
+                  </a:lnTo>
+                  <a:lnTo>
+                    <a:pt x="2077053" y="2338525"/>
+                  </a:lnTo>
+                  <a:lnTo>
+                    <a:pt x="2005430" y="2313406"/>
+                  </a:lnTo>
+                  <a:lnTo>
+                    <a:pt x="1933808" y="2287735"/>
+                  </a:lnTo>
+                  <a:lnTo>
+                    <a:pt x="1862185" y="2261501"/>
+                  </a:lnTo>
+                  <a:lnTo>
+                    <a:pt x="1790563" y="2234692"/>
+                  </a:lnTo>
+                  <a:lnTo>
+                    <a:pt x="1718940" y="2207295"/>
+                  </a:lnTo>
+                  <a:lnTo>
+                    <a:pt x="1647318" y="2179296"/>
+                  </a:lnTo>
+                  <a:lnTo>
+                    <a:pt x="1575695" y="2150684"/>
+                  </a:lnTo>
+                  <a:lnTo>
+                    <a:pt x="1504073" y="2121444"/>
+                  </a:lnTo>
+                  <a:lnTo>
+                    <a:pt x="1432450" y="2091563"/>
+                  </a:lnTo>
+                  <a:lnTo>
+                    <a:pt x="1360827" y="2061026"/>
+                  </a:lnTo>
+                  <a:lnTo>
+                    <a:pt x="1289205" y="2029820"/>
+                  </a:lnTo>
+                  <a:lnTo>
+                    <a:pt x="1217582" y="1997929"/>
+                  </a:lnTo>
+                  <a:lnTo>
+                    <a:pt x="1145960" y="1965338"/>
+                  </a:lnTo>
+                  <a:lnTo>
+                    <a:pt x="1074337" y="1932033"/>
+                  </a:lnTo>
+                  <a:lnTo>
+                    <a:pt x="1002715" y="1897997"/>
+                  </a:lnTo>
+                  <a:lnTo>
+                    <a:pt x="931092" y="1863214"/>
+                  </a:lnTo>
+                  <a:lnTo>
+                    <a:pt x="859470" y="1827669"/>
+                  </a:lnTo>
+                  <a:lnTo>
+                    <a:pt x="787847" y="1791344"/>
+                  </a:lnTo>
+                  <a:lnTo>
+                    <a:pt x="716225" y="1754222"/>
+                  </a:lnTo>
+                  <a:lnTo>
+                    <a:pt x="644602" y="1716286"/>
+                  </a:lnTo>
+                  <a:lnTo>
+                    <a:pt x="572980" y="1677518"/>
+                  </a:lnTo>
+                  <a:lnTo>
+                    <a:pt x="501357" y="1637899"/>
+                  </a:lnTo>
+                  <a:lnTo>
+                    <a:pt x="429735" y="1597412"/>
+                  </a:lnTo>
+                  <a:lnTo>
+                    <a:pt x="358112" y="1556036"/>
+                  </a:lnTo>
+                  <a:lnTo>
+                    <a:pt x="286490" y="1513753"/>
+                  </a:lnTo>
+                  <a:lnTo>
+                    <a:pt x="214867" y="1470542"/>
+                  </a:lnTo>
+                  <a:lnTo>
+                    <a:pt x="143245" y="1426384"/>
+                  </a:lnTo>
+                  <a:lnTo>
+                    <a:pt x="71622" y="1381257"/>
+                  </a:lnTo>
+                  <a:lnTo>
+                    <a:pt x="0" y="1335140"/>
                   </a:lnTo>
                   <a:lnTo>
                     <a:pt x="0" y="0"/>
@@ -3933,222 +3933,222 @@
           </p:nvSpPr>
           <p:spPr>
             <a:xfrm>
-              <a:off x="3373069" y="2073503"/>
-              <a:ext cx="4889609" cy="3229954"/>
+              <a:off x="3373978" y="2073503"/>
+              <a:ext cx="4888700" cy="3232975"/>
             </a:xfrm>
             <a:custGeom>
               <a:avLst/>
               <a:pathLst>
-                <a:path w="4889609" h="3229954">
+                <a:path w="4888700" h="3232975">
                   <a:moveTo>
                     <a:pt x="0" y="0"/>
                   </a:moveTo>
                   <a:lnTo>
-                    <a:pt x="19278" y="104923"/>
-                  </a:lnTo>
-                  <a:lnTo>
-                    <a:pt x="90900" y="454414"/>
-                  </a:lnTo>
-                  <a:lnTo>
-                    <a:pt x="162523" y="767756"/>
-                  </a:lnTo>
-                  <a:lnTo>
-                    <a:pt x="234145" y="1048687"/>
-                  </a:lnTo>
-                  <a:lnTo>
-                    <a:pt x="305768" y="1300559"/>
-                  </a:lnTo>
-                  <a:lnTo>
-                    <a:pt x="377390" y="1526379"/>
-                  </a:lnTo>
-                  <a:lnTo>
-                    <a:pt x="449013" y="1728841"/>
-                  </a:lnTo>
-                  <a:lnTo>
-                    <a:pt x="520635" y="1910361"/>
-                  </a:lnTo>
-                  <a:lnTo>
-                    <a:pt x="592258" y="2073106"/>
-                  </a:lnTo>
-                  <a:lnTo>
-                    <a:pt x="663880" y="2219017"/>
-                  </a:lnTo>
-                  <a:lnTo>
-                    <a:pt x="735503" y="2349835"/>
-                  </a:lnTo>
-                  <a:lnTo>
-                    <a:pt x="807125" y="2467122"/>
-                  </a:lnTo>
-                  <a:lnTo>
-                    <a:pt x="878748" y="2572277"/>
-                  </a:lnTo>
-                  <a:lnTo>
-                    <a:pt x="950371" y="2656712"/>
-                  </a:lnTo>
-                  <a:lnTo>
-                    <a:pt x="1021993" y="2674286"/>
-                  </a:lnTo>
-                  <a:lnTo>
-                    <a:pt x="1093616" y="2691487"/>
-                  </a:lnTo>
-                  <a:lnTo>
-                    <a:pt x="1165238" y="2708322"/>
-                  </a:lnTo>
-                  <a:lnTo>
-                    <a:pt x="1236861" y="2724799"/>
-                  </a:lnTo>
-                  <a:lnTo>
-                    <a:pt x="1308483" y="2740927"/>
-                  </a:lnTo>
-                  <a:lnTo>
-                    <a:pt x="1380106" y="2756711"/>
-                  </a:lnTo>
-                  <a:lnTo>
-                    <a:pt x="1451728" y="2772161"/>
-                  </a:lnTo>
-                  <a:lnTo>
-                    <a:pt x="1523351" y="2787282"/>
-                  </a:lnTo>
-                  <a:lnTo>
-                    <a:pt x="1594973" y="2802081"/>
-                  </a:lnTo>
-                  <a:lnTo>
-                    <a:pt x="1666596" y="2816566"/>
-                  </a:lnTo>
-                  <a:lnTo>
-                    <a:pt x="1738218" y="2830744"/>
-                  </a:lnTo>
-                  <a:lnTo>
-                    <a:pt x="1809841" y="2844620"/>
-                  </a:lnTo>
-                  <a:lnTo>
-                    <a:pt x="1881463" y="2858201"/>
-                  </a:lnTo>
-                  <a:lnTo>
-                    <a:pt x="1953086" y="2871494"/>
-                  </a:lnTo>
-                  <a:lnTo>
-                    <a:pt x="2024708" y="2884504"/>
-                  </a:lnTo>
-                  <a:lnTo>
-                    <a:pt x="2096331" y="2897238"/>
-                  </a:lnTo>
-                  <a:lnTo>
-                    <a:pt x="2167953" y="2909701"/>
-                  </a:lnTo>
-                  <a:lnTo>
-                    <a:pt x="2239576" y="2921899"/>
-                  </a:lnTo>
-                  <a:lnTo>
-                    <a:pt x="2311199" y="2933838"/>
-                  </a:lnTo>
-                  <a:lnTo>
-                    <a:pt x="2382821" y="2945523"/>
-                  </a:lnTo>
-                  <a:lnTo>
-                    <a:pt x="2454444" y="2956961"/>
-                  </a:lnTo>
-                  <a:lnTo>
-                    <a:pt x="2526066" y="2968155"/>
-                  </a:lnTo>
-                  <a:lnTo>
-                    <a:pt x="2597689" y="2979111"/>
-                  </a:lnTo>
-                  <a:lnTo>
-                    <a:pt x="2669311" y="2989834"/>
-                  </a:lnTo>
-                  <a:lnTo>
-                    <a:pt x="2740934" y="3000330"/>
-                  </a:lnTo>
-                  <a:lnTo>
-                    <a:pt x="2812556" y="3010602"/>
-                  </a:lnTo>
-                  <a:lnTo>
-                    <a:pt x="2884179" y="3020656"/>
-                  </a:lnTo>
-                  <a:lnTo>
-                    <a:pt x="2955801" y="3030497"/>
-                  </a:lnTo>
-                  <a:lnTo>
-                    <a:pt x="3027424" y="3040128"/>
-                  </a:lnTo>
-                  <a:lnTo>
-                    <a:pt x="3099046" y="3049555"/>
-                  </a:lnTo>
-                  <a:lnTo>
-                    <a:pt x="3170669" y="3058781"/>
-                  </a:lnTo>
-                  <a:lnTo>
-                    <a:pt x="3242291" y="3067812"/>
-                  </a:lnTo>
-                  <a:lnTo>
-                    <a:pt x="3313914" y="3076650"/>
-                  </a:lnTo>
-                  <a:lnTo>
-                    <a:pt x="3385536" y="3085301"/>
-                  </a:lnTo>
-                  <a:lnTo>
-                    <a:pt x="3457159" y="3093768"/>
-                  </a:lnTo>
-                  <a:lnTo>
-                    <a:pt x="3528781" y="3102055"/>
-                  </a:lnTo>
-                  <a:lnTo>
-                    <a:pt x="3600404" y="3110165"/>
-                  </a:lnTo>
-                  <a:lnTo>
-                    <a:pt x="3672027" y="3118104"/>
-                  </a:lnTo>
-                  <a:lnTo>
-                    <a:pt x="3743649" y="3125874"/>
-                  </a:lnTo>
-                  <a:lnTo>
-                    <a:pt x="3815272" y="3133478"/>
-                  </a:lnTo>
-                  <a:lnTo>
-                    <a:pt x="3886894" y="3140921"/>
-                  </a:lnTo>
-                  <a:lnTo>
-                    <a:pt x="3958517" y="3148206"/>
-                  </a:lnTo>
-                  <a:lnTo>
-                    <a:pt x="4030139" y="3155336"/>
-                  </a:lnTo>
-                  <a:lnTo>
-                    <a:pt x="4101762" y="3162315"/>
-                  </a:lnTo>
-                  <a:lnTo>
-                    <a:pt x="4173384" y="3169145"/>
-                  </a:lnTo>
-                  <a:lnTo>
-                    <a:pt x="4245007" y="3175830"/>
-                  </a:lnTo>
-                  <a:lnTo>
-                    <a:pt x="4316629" y="3182374"/>
-                  </a:lnTo>
-                  <a:lnTo>
-                    <a:pt x="4388252" y="3188778"/>
-                  </a:lnTo>
-                  <a:lnTo>
-                    <a:pt x="4459874" y="3195046"/>
-                  </a:lnTo>
-                  <a:lnTo>
-                    <a:pt x="4531497" y="3201180"/>
-                  </a:lnTo>
-                  <a:lnTo>
-                    <a:pt x="4603119" y="3207185"/>
-                  </a:lnTo>
-                  <a:lnTo>
-                    <a:pt x="4674742" y="3213062"/>
-                  </a:lnTo>
-                  <a:lnTo>
-                    <a:pt x="4746364" y="3218814"/>
-                  </a:lnTo>
-                  <a:lnTo>
-                    <a:pt x="4817987" y="3224443"/>
-                  </a:lnTo>
-                  <a:lnTo>
-                    <a:pt x="4889609" y="3229954"/>
+                    <a:pt x="18368" y="100190"/>
+                  </a:lnTo>
+                  <a:lnTo>
+                    <a:pt x="89991" y="450410"/>
+                  </a:lnTo>
+                  <a:lnTo>
+                    <a:pt x="161613" y="764380"/>
+                  </a:lnTo>
+                  <a:lnTo>
+                    <a:pt x="233236" y="1045852"/>
+                  </a:lnTo>
+                  <a:lnTo>
+                    <a:pt x="304858" y="1298190"/>
+                  </a:lnTo>
+                  <a:lnTo>
+                    <a:pt x="376481" y="1524410"/>
+                  </a:lnTo>
+                  <a:lnTo>
+                    <a:pt x="448103" y="1727214"/>
+                  </a:lnTo>
+                  <a:lnTo>
+                    <a:pt x="519726" y="1909026"/>
+                  </a:lnTo>
+                  <a:lnTo>
+                    <a:pt x="591348" y="2072020"/>
+                  </a:lnTo>
+                  <a:lnTo>
+                    <a:pt x="662971" y="2218143"/>
+                  </a:lnTo>
+                  <a:lnTo>
+                    <a:pt x="734594" y="2349141"/>
+                  </a:lnTo>
+                  <a:lnTo>
+                    <a:pt x="806216" y="2466580"/>
+                  </a:lnTo>
+                  <a:lnTo>
+                    <a:pt x="877839" y="2571864"/>
+                  </a:lnTo>
+                  <a:lnTo>
+                    <a:pt x="949461" y="2656673"/>
+                  </a:lnTo>
+                  <a:lnTo>
+                    <a:pt x="1021084" y="2674425"/>
+                  </a:lnTo>
+                  <a:lnTo>
+                    <a:pt x="1092706" y="2691796"/>
+                  </a:lnTo>
+                  <a:lnTo>
+                    <a:pt x="1164329" y="2708794"/>
+                  </a:lnTo>
+                  <a:lnTo>
+                    <a:pt x="1235951" y="2725427"/>
+                  </a:lnTo>
+                  <a:lnTo>
+                    <a:pt x="1307574" y="2741704"/>
+                  </a:lnTo>
+                  <a:lnTo>
+                    <a:pt x="1379196" y="2757631"/>
+                  </a:lnTo>
+                  <a:lnTo>
+                    <a:pt x="1450819" y="2773216"/>
+                  </a:lnTo>
+                  <a:lnTo>
+                    <a:pt x="1522441" y="2788466"/>
+                  </a:lnTo>
+                  <a:lnTo>
+                    <a:pt x="1594064" y="2803389"/>
+                  </a:lnTo>
+                  <a:lnTo>
+                    <a:pt x="1665686" y="2817992"/>
+                  </a:lnTo>
+                  <a:lnTo>
+                    <a:pt x="1737309" y="2832282"/>
+                  </a:lnTo>
+                  <a:lnTo>
+                    <a:pt x="1808931" y="2846265"/>
+                  </a:lnTo>
+                  <a:lnTo>
+                    <a:pt x="1880554" y="2859947"/>
+                  </a:lnTo>
+                  <a:lnTo>
+                    <a:pt x="1952176" y="2873336"/>
+                  </a:lnTo>
+                  <a:lnTo>
+                    <a:pt x="2023799" y="2886438"/>
+                  </a:lnTo>
+                  <a:lnTo>
+                    <a:pt x="2095422" y="2899258"/>
+                  </a:lnTo>
+                  <a:lnTo>
+                    <a:pt x="2167044" y="2911803"/>
+                  </a:lnTo>
+                  <a:lnTo>
+                    <a:pt x="2238667" y="2924079"/>
+                  </a:lnTo>
+                  <a:lnTo>
+                    <a:pt x="2310289" y="2936092"/>
+                  </a:lnTo>
+                  <a:lnTo>
+                    <a:pt x="2381912" y="2947846"/>
+                  </a:lnTo>
+                  <a:lnTo>
+                    <a:pt x="2453534" y="2959349"/>
+                  </a:lnTo>
+                  <a:lnTo>
+                    <a:pt x="2525157" y="2970604"/>
+                  </a:lnTo>
+                  <a:lnTo>
+                    <a:pt x="2596779" y="2981618"/>
+                  </a:lnTo>
+                  <a:lnTo>
+                    <a:pt x="2668402" y="2992396"/>
+                  </a:lnTo>
+                  <a:lnTo>
+                    <a:pt x="2740024" y="3002942"/>
+                  </a:lnTo>
+                  <a:lnTo>
+                    <a:pt x="2811647" y="3013262"/>
+                  </a:lnTo>
+                  <a:lnTo>
+                    <a:pt x="2883269" y="3023360"/>
+                  </a:lnTo>
+                  <a:lnTo>
+                    <a:pt x="2954892" y="3033241"/>
+                  </a:lnTo>
+                  <a:lnTo>
+                    <a:pt x="3026514" y="3042911"/>
+                  </a:lnTo>
+                  <a:lnTo>
+                    <a:pt x="3098137" y="3052373"/>
+                  </a:lnTo>
+                  <a:lnTo>
+                    <a:pt x="3169759" y="3061632"/>
+                  </a:lnTo>
+                  <a:lnTo>
+                    <a:pt x="3241382" y="3070692"/>
+                  </a:lnTo>
+                  <a:lnTo>
+                    <a:pt x="3313004" y="3079557"/>
+                  </a:lnTo>
+                  <a:lnTo>
+                    <a:pt x="3384627" y="3088233"/>
+                  </a:lnTo>
+                  <a:lnTo>
+                    <a:pt x="3456250" y="3096722"/>
+                  </a:lnTo>
+                  <a:lnTo>
+                    <a:pt x="3527872" y="3105029"/>
+                  </a:lnTo>
+                  <a:lnTo>
+                    <a:pt x="3599495" y="3113158"/>
+                  </a:lnTo>
+                  <a:lnTo>
+                    <a:pt x="3671117" y="3121112"/>
+                  </a:lnTo>
+                  <a:lnTo>
+                    <a:pt x="3742740" y="3128895"/>
+                  </a:lnTo>
+                  <a:lnTo>
+                    <a:pt x="3814362" y="3136512"/>
+                  </a:lnTo>
+                  <a:lnTo>
+                    <a:pt x="3885985" y="3143964"/>
+                  </a:lnTo>
+                  <a:lnTo>
+                    <a:pt x="3957607" y="3151257"/>
+                  </a:lnTo>
+                  <a:lnTo>
+                    <a:pt x="4029230" y="3158394"/>
+                  </a:lnTo>
+                  <a:lnTo>
+                    <a:pt x="4100852" y="3165377"/>
+                  </a:lnTo>
+                  <a:lnTo>
+                    <a:pt x="4172475" y="3172210"/>
+                  </a:lnTo>
+                  <a:lnTo>
+                    <a:pt x="4244097" y="3178897"/>
+                  </a:lnTo>
+                  <a:lnTo>
+                    <a:pt x="4315720" y="3185440"/>
+                  </a:lnTo>
+                  <a:lnTo>
+                    <a:pt x="4387342" y="3191843"/>
+                  </a:lnTo>
+                  <a:lnTo>
+                    <a:pt x="4458965" y="3198108"/>
+                  </a:lnTo>
+                  <a:lnTo>
+                    <a:pt x="4530587" y="3204239"/>
+                  </a:lnTo>
+                  <a:lnTo>
+                    <a:pt x="4602210" y="3210238"/>
+                  </a:lnTo>
+                  <a:lnTo>
+                    <a:pt x="4673832" y="3216109"/>
+                  </a:lnTo>
+                  <a:lnTo>
+                    <a:pt x="4745455" y="3221853"/>
+                  </a:lnTo>
+                  <a:lnTo>
+                    <a:pt x="4817078" y="3227474"/>
+                  </a:lnTo>
+                  <a:lnTo>
+                    <a:pt x="4888700" y="3232975"/>
                   </a:lnTo>
                 </a:path>
               </a:pathLst>
@@ -4168,309 +4168,309 @@
           </p:nvSpPr>
           <p:spPr>
             <a:xfrm>
-              <a:off x="1172049" y="3429310"/>
-              <a:ext cx="7090630" cy="2125923"/>
+              <a:off x="1172049" y="3408643"/>
+              <a:ext cx="7090630" cy="2146599"/>
             </a:xfrm>
             <a:custGeom>
               <a:avLst/>
               <a:pathLst>
-                <a:path w="7090630" h="2125923">
+                <a:path w="7090630" h="2146599">
                   <a:moveTo>
-                    <a:pt x="7090630" y="2125923"/>
+                    <a:pt x="7090630" y="2146599"/>
                   </a:moveTo>
                   <a:lnTo>
-                    <a:pt x="7019007" y="2125691"/>
-                  </a:lnTo>
-                  <a:lnTo>
-                    <a:pt x="6947385" y="2125432"/>
-                  </a:lnTo>
-                  <a:lnTo>
-                    <a:pt x="6875762" y="2125142"/>
-                  </a:lnTo>
-                  <a:lnTo>
-                    <a:pt x="6804139" y="2124820"/>
-                  </a:lnTo>
-                  <a:lnTo>
-                    <a:pt x="6732517" y="2124460"/>
-                  </a:lnTo>
-                  <a:lnTo>
-                    <a:pt x="6660894" y="2124059"/>
-                  </a:lnTo>
-                  <a:lnTo>
-                    <a:pt x="6589272" y="2123611"/>
-                  </a:lnTo>
-                  <a:lnTo>
-                    <a:pt x="6517649" y="2123112"/>
-                  </a:lnTo>
-                  <a:lnTo>
-                    <a:pt x="6446027" y="2122555"/>
-                  </a:lnTo>
-                  <a:lnTo>
-                    <a:pt x="6374404" y="2121934"/>
-                  </a:lnTo>
-                  <a:lnTo>
-                    <a:pt x="6302782" y="2121241"/>
-                  </a:lnTo>
-                  <a:lnTo>
-                    <a:pt x="6231159" y="2120468"/>
-                  </a:lnTo>
-                  <a:lnTo>
-                    <a:pt x="6159537" y="2119607"/>
-                  </a:lnTo>
-                  <a:lnTo>
-                    <a:pt x="6087914" y="2118645"/>
-                  </a:lnTo>
-                  <a:lnTo>
-                    <a:pt x="6016292" y="2117573"/>
-                  </a:lnTo>
-                  <a:lnTo>
-                    <a:pt x="5944669" y="2116377"/>
-                  </a:lnTo>
-                  <a:lnTo>
-                    <a:pt x="5873047" y="2115044"/>
-                  </a:lnTo>
-                  <a:lnTo>
-                    <a:pt x="5801424" y="2113556"/>
-                  </a:lnTo>
-                  <a:lnTo>
-                    <a:pt x="5729802" y="2111897"/>
-                  </a:lnTo>
-                  <a:lnTo>
-                    <a:pt x="5658179" y="2110046"/>
-                  </a:lnTo>
-                  <a:lnTo>
-                    <a:pt x="5586557" y="2107982"/>
-                  </a:lnTo>
-                  <a:lnTo>
-                    <a:pt x="5514934" y="2105679"/>
-                  </a:lnTo>
-                  <a:lnTo>
-                    <a:pt x="5443311" y="2103111"/>
-                  </a:lnTo>
-                  <a:lnTo>
-                    <a:pt x="5371689" y="2100247"/>
-                  </a:lnTo>
-                  <a:lnTo>
-                    <a:pt x="5300066" y="2097052"/>
-                  </a:lnTo>
-                  <a:lnTo>
-                    <a:pt x="5228444" y="2093489"/>
-                  </a:lnTo>
-                  <a:lnTo>
-                    <a:pt x="5156821" y="2089515"/>
-                  </a:lnTo>
-                  <a:lnTo>
-                    <a:pt x="5085199" y="2085082"/>
-                  </a:lnTo>
-                  <a:lnTo>
-                    <a:pt x="5013576" y="2080137"/>
-                  </a:lnTo>
-                  <a:lnTo>
-                    <a:pt x="4941954" y="2074623"/>
-                  </a:lnTo>
-                  <a:lnTo>
-                    <a:pt x="4870331" y="2068472"/>
-                  </a:lnTo>
-                  <a:lnTo>
-                    <a:pt x="4798709" y="2061611"/>
-                  </a:lnTo>
-                  <a:lnTo>
-                    <a:pt x="4727086" y="2053959"/>
-                  </a:lnTo>
-                  <a:lnTo>
-                    <a:pt x="4655464" y="2045424"/>
-                  </a:lnTo>
-                  <a:lnTo>
-                    <a:pt x="4583841" y="2035904"/>
-                  </a:lnTo>
-                  <a:lnTo>
-                    <a:pt x="4512219" y="2025286"/>
-                  </a:lnTo>
-                  <a:lnTo>
-                    <a:pt x="4440596" y="2013443"/>
-                  </a:lnTo>
-                  <a:lnTo>
-                    <a:pt x="4368974" y="2000234"/>
-                  </a:lnTo>
-                  <a:lnTo>
-                    <a:pt x="4297351" y="1985501"/>
-                  </a:lnTo>
-                  <a:lnTo>
-                    <a:pt x="4225729" y="1969068"/>
-                  </a:lnTo>
-                  <a:lnTo>
-                    <a:pt x="4154106" y="1950739"/>
-                  </a:lnTo>
-                  <a:lnTo>
-                    <a:pt x="4082483" y="1930296"/>
-                  </a:lnTo>
-                  <a:lnTo>
-                    <a:pt x="4010861" y="1907494"/>
-                  </a:lnTo>
-                  <a:lnTo>
-                    <a:pt x="3939238" y="1882061"/>
-                  </a:lnTo>
-                  <a:lnTo>
-                    <a:pt x="3867616" y="1853695"/>
-                  </a:lnTo>
-                  <a:lnTo>
-                    <a:pt x="3795993" y="1822055"/>
-                  </a:lnTo>
-                  <a:lnTo>
-                    <a:pt x="3724371" y="1786766"/>
-                  </a:lnTo>
-                  <a:lnTo>
-                    <a:pt x="3652748" y="1747405"/>
-                  </a:lnTo>
-                  <a:lnTo>
-                    <a:pt x="3581126" y="1703503"/>
-                  </a:lnTo>
-                  <a:lnTo>
-                    <a:pt x="3509503" y="1654537"/>
-                  </a:lnTo>
-                  <a:lnTo>
-                    <a:pt x="3437881" y="1599921"/>
-                  </a:lnTo>
-                  <a:lnTo>
-                    <a:pt x="3366258" y="1539004"/>
-                  </a:lnTo>
-                  <a:lnTo>
-                    <a:pt x="3294636" y="1471059"/>
-                  </a:lnTo>
-                  <a:lnTo>
-                    <a:pt x="3223013" y="1395275"/>
-                  </a:lnTo>
-                  <a:lnTo>
-                    <a:pt x="3151391" y="1310748"/>
-                  </a:lnTo>
-                  <a:lnTo>
-                    <a:pt x="3079768" y="1282948"/>
-                  </a:lnTo>
-                  <a:lnTo>
-                    <a:pt x="3008146" y="1264602"/>
-                  </a:lnTo>
-                  <a:lnTo>
-                    <a:pt x="2936523" y="1245858"/>
-                  </a:lnTo>
-                  <a:lnTo>
-                    <a:pt x="2864901" y="1226708"/>
-                  </a:lnTo>
-                  <a:lnTo>
-                    <a:pt x="2793278" y="1207141"/>
-                  </a:lnTo>
-                  <a:lnTo>
-                    <a:pt x="2721655" y="1187150"/>
-                  </a:lnTo>
-                  <a:lnTo>
-                    <a:pt x="2650033" y="1166724"/>
-                  </a:lnTo>
-                  <a:lnTo>
-                    <a:pt x="2578410" y="1145855"/>
-                  </a:lnTo>
-                  <a:lnTo>
-                    <a:pt x="2506788" y="1124533"/>
-                  </a:lnTo>
-                  <a:lnTo>
-                    <a:pt x="2435165" y="1102748"/>
-                  </a:lnTo>
-                  <a:lnTo>
-                    <a:pt x="2363543" y="1080490"/>
-                  </a:lnTo>
-                  <a:lnTo>
-                    <a:pt x="2291920" y="1057749"/>
-                  </a:lnTo>
-                  <a:lnTo>
-                    <a:pt x="2220298" y="1034514"/>
-                  </a:lnTo>
-                  <a:lnTo>
-                    <a:pt x="2148675" y="1010775"/>
-                  </a:lnTo>
-                  <a:lnTo>
-                    <a:pt x="2077053" y="986520"/>
-                  </a:lnTo>
-                  <a:lnTo>
-                    <a:pt x="2005430" y="961739"/>
-                  </a:lnTo>
-                  <a:lnTo>
-                    <a:pt x="1933808" y="936419"/>
-                  </a:lnTo>
-                  <a:lnTo>
-                    <a:pt x="1862185" y="910550"/>
-                  </a:lnTo>
-                  <a:lnTo>
-                    <a:pt x="1790563" y="884119"/>
-                  </a:lnTo>
-                  <a:lnTo>
-                    <a:pt x="1718940" y="857115"/>
-                  </a:lnTo>
-                  <a:lnTo>
-                    <a:pt x="1647318" y="829524"/>
-                  </a:lnTo>
-                  <a:lnTo>
-                    <a:pt x="1575695" y="801334"/>
-                  </a:lnTo>
-                  <a:lnTo>
-                    <a:pt x="1504073" y="772532"/>
-                  </a:lnTo>
-                  <a:lnTo>
-                    <a:pt x="1432450" y="743105"/>
-                  </a:lnTo>
-                  <a:lnTo>
-                    <a:pt x="1360827" y="713039"/>
-                  </a:lnTo>
-                  <a:lnTo>
-                    <a:pt x="1289205" y="682320"/>
-                  </a:lnTo>
-                  <a:lnTo>
-                    <a:pt x="1217582" y="650934"/>
-                  </a:lnTo>
-                  <a:lnTo>
-                    <a:pt x="1145960" y="618867"/>
-                  </a:lnTo>
-                  <a:lnTo>
-                    <a:pt x="1074337" y="586103"/>
-                  </a:lnTo>
-                  <a:lnTo>
-                    <a:pt x="1002715" y="552628"/>
-                  </a:lnTo>
-                  <a:lnTo>
-                    <a:pt x="931092" y="518427"/>
-                  </a:lnTo>
-                  <a:lnTo>
-                    <a:pt x="859470" y="483483"/>
-                  </a:lnTo>
-                  <a:lnTo>
-                    <a:pt x="787847" y="447780"/>
-                  </a:lnTo>
-                  <a:lnTo>
-                    <a:pt x="716225" y="411302"/>
-                  </a:lnTo>
-                  <a:lnTo>
-                    <a:pt x="644602" y="374032"/>
-                  </a:lnTo>
-                  <a:lnTo>
-                    <a:pt x="572980" y="335953"/>
-                  </a:lnTo>
-                  <a:lnTo>
-                    <a:pt x="501357" y="297047"/>
-                  </a:lnTo>
-                  <a:lnTo>
-                    <a:pt x="429735" y="257296"/>
-                  </a:lnTo>
-                  <a:lnTo>
-                    <a:pt x="358112" y="216683"/>
-                  </a:lnTo>
-                  <a:lnTo>
-                    <a:pt x="286490" y="175188"/>
-                  </a:lnTo>
-                  <a:lnTo>
-                    <a:pt x="214867" y="132791"/>
-                  </a:lnTo>
-                  <a:lnTo>
-                    <a:pt x="143245" y="89475"/>
-                  </a:lnTo>
-                  <a:lnTo>
-                    <a:pt x="71622" y="45217"/>
+                    <a:pt x="7019007" y="2146367"/>
+                  </a:lnTo>
+                  <a:lnTo>
+                    <a:pt x="6947385" y="2146108"/>
+                  </a:lnTo>
+                  <a:lnTo>
+                    <a:pt x="6875762" y="2145820"/>
+                  </a:lnTo>
+                  <a:lnTo>
+                    <a:pt x="6804139" y="2145499"/>
+                  </a:lnTo>
+                  <a:lnTo>
+                    <a:pt x="6732517" y="2145140"/>
+                  </a:lnTo>
+                  <a:lnTo>
+                    <a:pt x="6660894" y="2144740"/>
+                  </a:lnTo>
+                  <a:lnTo>
+                    <a:pt x="6589272" y="2144293"/>
+                  </a:lnTo>
+                  <a:lnTo>
+                    <a:pt x="6517649" y="2143795"/>
+                  </a:lnTo>
+                  <a:lnTo>
+                    <a:pt x="6446027" y="2143240"/>
+                  </a:lnTo>
+                  <a:lnTo>
+                    <a:pt x="6374404" y="2142620"/>
+                  </a:lnTo>
+                  <a:lnTo>
+                    <a:pt x="6302782" y="2141929"/>
+                  </a:lnTo>
+                  <a:lnTo>
+                    <a:pt x="6231159" y="2141158"/>
+                  </a:lnTo>
+                  <a:lnTo>
+                    <a:pt x="6159537" y="2140298"/>
+                  </a:lnTo>
+                  <a:lnTo>
+                    <a:pt x="6087914" y="2139339"/>
+                  </a:lnTo>
+                  <a:lnTo>
+                    <a:pt x="6016292" y="2138269"/>
+                  </a:lnTo>
+                  <a:lnTo>
+                    <a:pt x="5944669" y="2137076"/>
+                  </a:lnTo>
+                  <a:lnTo>
+                    <a:pt x="5873047" y="2135745"/>
+                  </a:lnTo>
+                  <a:lnTo>
+                    <a:pt x="5801424" y="2134260"/>
+                  </a:lnTo>
+                  <a:lnTo>
+                    <a:pt x="5729802" y="2132604"/>
+                  </a:lnTo>
+                  <a:lnTo>
+                    <a:pt x="5658179" y="2130756"/>
+                  </a:lnTo>
+                  <a:lnTo>
+                    <a:pt x="5586557" y="2128695"/>
+                  </a:lnTo>
+                  <a:lnTo>
+                    <a:pt x="5514934" y="2126396"/>
+                  </a:lnTo>
+                  <a:lnTo>
+                    <a:pt x="5443311" y="2123832"/>
+                  </a:lnTo>
+                  <a:lnTo>
+                    <a:pt x="5371689" y="2120972"/>
+                  </a:lnTo>
+                  <a:lnTo>
+                    <a:pt x="5300066" y="2117781"/>
+                  </a:lnTo>
+                  <a:lnTo>
+                    <a:pt x="5228444" y="2114222"/>
+                  </a:lnTo>
+                  <a:lnTo>
+                    <a:pt x="5156821" y="2110252"/>
+                  </a:lnTo>
+                  <a:lnTo>
+                    <a:pt x="5085199" y="2105824"/>
+                  </a:lnTo>
+                  <a:lnTo>
+                    <a:pt x="5013576" y="2100885"/>
+                  </a:lnTo>
+                  <a:lnTo>
+                    <a:pt x="4941954" y="2095375"/>
+                  </a:lnTo>
+                  <a:lnTo>
+                    <a:pt x="4870331" y="2089229"/>
+                  </a:lnTo>
+                  <a:lnTo>
+                    <a:pt x="4798709" y="2082374"/>
+                  </a:lnTo>
+                  <a:lnTo>
+                    <a:pt x="4727086" y="2074727"/>
+                  </a:lnTo>
+                  <a:lnTo>
+                    <a:pt x="4655464" y="2066197"/>
+                  </a:lnTo>
+                  <a:lnTo>
+                    <a:pt x="4583841" y="2056682"/>
+                  </a:lnTo>
+                  <a:lnTo>
+                    <a:pt x="4512219" y="2046069"/>
+                  </a:lnTo>
+                  <a:lnTo>
+                    <a:pt x="4440596" y="2034230"/>
+                  </a:lnTo>
+                  <a:lnTo>
+                    <a:pt x="4368974" y="2021024"/>
+                  </a:lnTo>
+                  <a:lnTo>
+                    <a:pt x="4297351" y="2006294"/>
+                  </a:lnTo>
+                  <a:lnTo>
+                    <a:pt x="4225729" y="1989863"/>
+                  </a:lnTo>
+                  <a:lnTo>
+                    <a:pt x="4154106" y="1971535"/>
+                  </a:lnTo>
+                  <a:lnTo>
+                    <a:pt x="4082483" y="1951091"/>
+                  </a:lnTo>
+                  <a:lnTo>
+                    <a:pt x="4010861" y="1928287"/>
+                  </a:lnTo>
+                  <a:lnTo>
+                    <a:pt x="3939238" y="1902850"/>
+                  </a:lnTo>
+                  <a:lnTo>
+                    <a:pt x="3867616" y="1874475"/>
+                  </a:lnTo>
+                  <a:lnTo>
+                    <a:pt x="3795993" y="1842825"/>
+                  </a:lnTo>
+                  <a:lnTo>
+                    <a:pt x="3724371" y="1807520"/>
+                  </a:lnTo>
+                  <a:lnTo>
+                    <a:pt x="3652748" y="1768140"/>
+                  </a:lnTo>
+                  <a:lnTo>
+                    <a:pt x="3581126" y="1724212"/>
+                  </a:lnTo>
+                  <a:lnTo>
+                    <a:pt x="3509503" y="1675213"/>
+                  </a:lnTo>
+                  <a:lnTo>
+                    <a:pt x="3437881" y="1620556"/>
+                  </a:lnTo>
+                  <a:lnTo>
+                    <a:pt x="3366258" y="1559589"/>
+                  </a:lnTo>
+                  <a:lnTo>
+                    <a:pt x="3294636" y="1491583"/>
+                  </a:lnTo>
+                  <a:lnTo>
+                    <a:pt x="3223013" y="1415725"/>
+                  </a:lnTo>
+                  <a:lnTo>
+                    <a:pt x="3151391" y="1331109"/>
+                  </a:lnTo>
+                  <a:lnTo>
+                    <a:pt x="3079768" y="1303391"/>
+                  </a:lnTo>
+                  <a:lnTo>
+                    <a:pt x="3008146" y="1284852"/>
+                  </a:lnTo>
+                  <a:lnTo>
+                    <a:pt x="2936523" y="1265906"/>
+                  </a:lnTo>
+                  <a:lnTo>
+                    <a:pt x="2864901" y="1246544"/>
+                  </a:lnTo>
+                  <a:lnTo>
+                    <a:pt x="2793278" y="1226758"/>
+                  </a:lnTo>
+                  <a:lnTo>
+                    <a:pt x="2721655" y="1206538"/>
+                  </a:lnTo>
+                  <a:lnTo>
+                    <a:pt x="2650033" y="1185874"/>
+                  </a:lnTo>
+                  <a:lnTo>
+                    <a:pt x="2578410" y="1164757"/>
+                  </a:lnTo>
+                  <a:lnTo>
+                    <a:pt x="2506788" y="1143177"/>
+                  </a:lnTo>
+                  <a:lnTo>
+                    <a:pt x="2435165" y="1121124"/>
+                  </a:lnTo>
+                  <a:lnTo>
+                    <a:pt x="2363543" y="1098587"/>
+                  </a:lnTo>
+                  <a:lnTo>
+                    <a:pt x="2291920" y="1075555"/>
+                  </a:lnTo>
+                  <a:lnTo>
+                    <a:pt x="2220298" y="1052018"/>
+                  </a:lnTo>
+                  <a:lnTo>
+                    <a:pt x="2148675" y="1027965"/>
+                  </a:lnTo>
+                  <a:lnTo>
+                    <a:pt x="2077053" y="1003385"/>
+                  </a:lnTo>
+                  <a:lnTo>
+                    <a:pt x="2005430" y="978265"/>
+                  </a:lnTo>
+                  <a:lnTo>
+                    <a:pt x="1933808" y="952594"/>
+                  </a:lnTo>
+                  <a:lnTo>
+                    <a:pt x="1862185" y="926361"/>
+                  </a:lnTo>
+                  <a:lnTo>
+                    <a:pt x="1790563" y="899551"/>
+                  </a:lnTo>
+                  <a:lnTo>
+                    <a:pt x="1718940" y="872154"/>
+                  </a:lnTo>
+                  <a:lnTo>
+                    <a:pt x="1647318" y="844156"/>
+                  </a:lnTo>
+                  <a:lnTo>
+                    <a:pt x="1575695" y="815544"/>
+                  </a:lnTo>
+                  <a:lnTo>
+                    <a:pt x="1504073" y="786304"/>
+                  </a:lnTo>
+                  <a:lnTo>
+                    <a:pt x="1432450" y="756422"/>
+                  </a:lnTo>
+                  <a:lnTo>
+                    <a:pt x="1360827" y="725886"/>
+                  </a:lnTo>
+                  <a:lnTo>
+                    <a:pt x="1289205" y="694679"/>
+                  </a:lnTo>
+                  <a:lnTo>
+                    <a:pt x="1217582" y="662788"/>
+                  </a:lnTo>
+                  <a:lnTo>
+                    <a:pt x="1145960" y="630198"/>
+                  </a:lnTo>
+                  <a:lnTo>
+                    <a:pt x="1074337" y="596892"/>
+                  </a:lnTo>
+                  <a:lnTo>
+                    <a:pt x="1002715" y="562856"/>
+                  </a:lnTo>
+                  <a:lnTo>
+                    <a:pt x="931092" y="528074"/>
+                  </a:lnTo>
+                  <a:lnTo>
+                    <a:pt x="859470" y="492528"/>
+                  </a:lnTo>
+                  <a:lnTo>
+                    <a:pt x="787847" y="456203"/>
+                  </a:lnTo>
+                  <a:lnTo>
+                    <a:pt x="716225" y="419082"/>
+                  </a:lnTo>
+                  <a:lnTo>
+                    <a:pt x="644602" y="381145"/>
+                  </a:lnTo>
+                  <a:lnTo>
+                    <a:pt x="572980" y="342377"/>
+                  </a:lnTo>
+                  <a:lnTo>
+                    <a:pt x="501357" y="302759"/>
+                  </a:lnTo>
+                  <a:lnTo>
+                    <a:pt x="429735" y="262271"/>
+                  </a:lnTo>
+                  <a:lnTo>
+                    <a:pt x="358112" y="220896"/>
+                  </a:lnTo>
+                  <a:lnTo>
+                    <a:pt x="286490" y="178612"/>
+                  </a:lnTo>
+                  <a:lnTo>
+                    <a:pt x="214867" y="135402"/>
+                  </a:lnTo>
+                  <a:lnTo>
+                    <a:pt x="143245" y="91243"/>
+                  </a:lnTo>
+                  <a:lnTo>
+                    <a:pt x="71622" y="46116"/>
                   </a:lnTo>
                   <a:lnTo>
                     <a:pt x="0" y="0"/>
@@ -4493,249 +4493,249 @@
           </p:nvSpPr>
           <p:spPr>
             <a:xfrm>
-              <a:off x="2740614" y="2073503"/>
-              <a:ext cx="5522064" cy="3461132"/>
+              <a:off x="2744335" y="2073503"/>
+              <a:ext cx="5518343" cy="3461311"/>
             </a:xfrm>
             <a:custGeom>
               <a:avLst/>
               <a:pathLst>
-                <a:path w="5522064" h="3461132">
+                <a:path w="5518343" h="3461311">
                   <a:moveTo>
                     <a:pt x="0" y="0"/>
                   </a:moveTo>
                   <a:lnTo>
-                    <a:pt x="7130" y="23258"/>
-                  </a:lnTo>
-                  <a:lnTo>
-                    <a:pt x="78752" y="242112"/>
-                  </a:lnTo>
-                  <a:lnTo>
-                    <a:pt x="150375" y="447125"/>
-                  </a:lnTo>
-                  <a:lnTo>
-                    <a:pt x="221997" y="639172"/>
-                  </a:lnTo>
-                  <a:lnTo>
-                    <a:pt x="293620" y="819073"/>
-                  </a:lnTo>
-                  <a:lnTo>
-                    <a:pt x="365242" y="987597"/>
-                  </a:lnTo>
-                  <a:lnTo>
-                    <a:pt x="436865" y="1145463"/>
-                  </a:lnTo>
-                  <a:lnTo>
-                    <a:pt x="508488" y="1293344"/>
-                  </a:lnTo>
-                  <a:lnTo>
-                    <a:pt x="580110" y="1431873"/>
-                  </a:lnTo>
-                  <a:lnTo>
-                    <a:pt x="651733" y="1561641"/>
-                  </a:lnTo>
-                  <a:lnTo>
-                    <a:pt x="723355" y="1683202"/>
-                  </a:lnTo>
-                  <a:lnTo>
-                    <a:pt x="794978" y="1797075"/>
-                  </a:lnTo>
-                  <a:lnTo>
-                    <a:pt x="866600" y="1903746"/>
-                  </a:lnTo>
-                  <a:lnTo>
-                    <a:pt x="938223" y="2003671"/>
-                  </a:lnTo>
-                  <a:lnTo>
-                    <a:pt x="1009845" y="2097277"/>
-                  </a:lnTo>
-                  <a:lnTo>
-                    <a:pt x="1081468" y="2184962"/>
-                  </a:lnTo>
-                  <a:lnTo>
-                    <a:pt x="1153090" y="2267102"/>
-                  </a:lnTo>
-                  <a:lnTo>
-                    <a:pt x="1224713" y="2344047"/>
-                  </a:lnTo>
-                  <a:lnTo>
-                    <a:pt x="1296335" y="2416126"/>
-                  </a:lnTo>
-                  <a:lnTo>
-                    <a:pt x="1367958" y="2483646"/>
-                  </a:lnTo>
-                  <a:lnTo>
-                    <a:pt x="1439580" y="2546896"/>
-                  </a:lnTo>
-                  <a:lnTo>
-                    <a:pt x="1511203" y="2606146"/>
-                  </a:lnTo>
-                  <a:lnTo>
-                    <a:pt x="1582825" y="2661649"/>
-                  </a:lnTo>
-                  <a:lnTo>
-                    <a:pt x="1654448" y="2713641"/>
-                  </a:lnTo>
-                  <a:lnTo>
-                    <a:pt x="1726070" y="2762345"/>
-                  </a:lnTo>
-                  <a:lnTo>
-                    <a:pt x="1797693" y="2807969"/>
-                  </a:lnTo>
-                  <a:lnTo>
-                    <a:pt x="1869316" y="2850708"/>
-                  </a:lnTo>
-                  <a:lnTo>
-                    <a:pt x="1940938" y="2890744"/>
-                  </a:lnTo>
-                  <a:lnTo>
-                    <a:pt x="2012561" y="2928247"/>
-                  </a:lnTo>
-                  <a:lnTo>
-                    <a:pt x="2084183" y="2963379"/>
-                  </a:lnTo>
-                  <a:lnTo>
-                    <a:pt x="2155806" y="2996289"/>
-                  </a:lnTo>
-                  <a:lnTo>
-                    <a:pt x="2227428" y="3027118"/>
-                  </a:lnTo>
-                  <a:lnTo>
-                    <a:pt x="2299051" y="3055997"/>
-                  </a:lnTo>
-                  <a:lnTo>
-                    <a:pt x="2370673" y="3083049"/>
-                  </a:lnTo>
-                  <a:lnTo>
-                    <a:pt x="2442296" y="3108391"/>
-                  </a:lnTo>
-                  <a:lnTo>
-                    <a:pt x="2513918" y="3132129"/>
-                  </a:lnTo>
-                  <a:lnTo>
-                    <a:pt x="2585541" y="3154367"/>
-                  </a:lnTo>
-                  <a:lnTo>
-                    <a:pt x="2657163" y="3175198"/>
-                  </a:lnTo>
-                  <a:lnTo>
-                    <a:pt x="2728786" y="3194712"/>
-                  </a:lnTo>
-                  <a:lnTo>
-                    <a:pt x="2800408" y="3212991"/>
-                  </a:lnTo>
-                  <a:lnTo>
-                    <a:pt x="2872031" y="3230115"/>
-                  </a:lnTo>
-                  <a:lnTo>
-                    <a:pt x="2943653" y="3246156"/>
-                  </a:lnTo>
-                  <a:lnTo>
-                    <a:pt x="3015276" y="3261182"/>
-                  </a:lnTo>
-                  <a:lnTo>
-                    <a:pt x="3086898" y="3275257"/>
-                  </a:lnTo>
-                  <a:lnTo>
-                    <a:pt x="3158521" y="3288443"/>
-                  </a:lnTo>
-                  <a:lnTo>
-                    <a:pt x="3230144" y="3300795"/>
-                  </a:lnTo>
-                  <a:lnTo>
-                    <a:pt x="3301766" y="3312365"/>
-                  </a:lnTo>
-                  <a:lnTo>
-                    <a:pt x="3373389" y="3323204"/>
-                  </a:lnTo>
-                  <a:lnTo>
-                    <a:pt x="3445011" y="3333357"/>
-                  </a:lnTo>
-                  <a:lnTo>
-                    <a:pt x="3516634" y="3342869"/>
-                  </a:lnTo>
-                  <a:lnTo>
-                    <a:pt x="3588256" y="3351778"/>
-                  </a:lnTo>
-                  <a:lnTo>
-                    <a:pt x="3659879" y="3360124"/>
-                  </a:lnTo>
-                  <a:lnTo>
-                    <a:pt x="3731501" y="3367943"/>
-                  </a:lnTo>
-                  <a:lnTo>
-                    <a:pt x="3803124" y="3375266"/>
-                  </a:lnTo>
-                  <a:lnTo>
-                    <a:pt x="3874746" y="3382127"/>
-                  </a:lnTo>
-                  <a:lnTo>
-                    <a:pt x="3946369" y="3388554"/>
-                  </a:lnTo>
-                  <a:lnTo>
-                    <a:pt x="4017991" y="3394574"/>
-                  </a:lnTo>
-                  <a:lnTo>
-                    <a:pt x="4089614" y="3400214"/>
-                  </a:lnTo>
-                  <a:lnTo>
-                    <a:pt x="4161236" y="3405497"/>
-                  </a:lnTo>
-                  <a:lnTo>
-                    <a:pt x="4232859" y="3410446"/>
-                  </a:lnTo>
-                  <a:lnTo>
-                    <a:pt x="4304481" y="3415081"/>
-                  </a:lnTo>
-                  <a:lnTo>
-                    <a:pt x="4376104" y="3419424"/>
-                  </a:lnTo>
-                  <a:lnTo>
-                    <a:pt x="4447726" y="3423492"/>
-                  </a:lnTo>
-                  <a:lnTo>
-                    <a:pt x="4519349" y="3427303"/>
-                  </a:lnTo>
-                  <a:lnTo>
-                    <a:pt x="4590972" y="3430872"/>
-                  </a:lnTo>
-                  <a:lnTo>
-                    <a:pt x="4662594" y="3434216"/>
-                  </a:lnTo>
-                  <a:lnTo>
-                    <a:pt x="4734217" y="3437349"/>
-                  </a:lnTo>
-                  <a:lnTo>
-                    <a:pt x="4805839" y="3440283"/>
-                  </a:lnTo>
-                  <a:lnTo>
-                    <a:pt x="4877462" y="3443032"/>
-                  </a:lnTo>
-                  <a:lnTo>
-                    <a:pt x="4949084" y="3445607"/>
-                  </a:lnTo>
-                  <a:lnTo>
-                    <a:pt x="5020707" y="3448019"/>
-                  </a:lnTo>
-                  <a:lnTo>
-                    <a:pt x="5092329" y="3450278"/>
-                  </a:lnTo>
-                  <a:lnTo>
-                    <a:pt x="5163952" y="3452395"/>
-                  </a:lnTo>
-                  <a:lnTo>
-                    <a:pt x="5235574" y="3454378"/>
-                  </a:lnTo>
-                  <a:lnTo>
-                    <a:pt x="5307197" y="3456235"/>
-                  </a:lnTo>
-                  <a:lnTo>
-                    <a:pt x="5378819" y="3457975"/>
-                  </a:lnTo>
-                  <a:lnTo>
-                    <a:pt x="5450442" y="3459605"/>
-                  </a:lnTo>
-                  <a:lnTo>
-                    <a:pt x="5522064" y="3461132"/>
+                    <a:pt x="3409" y="11185"/>
+                  </a:lnTo>
+                  <a:lnTo>
+                    <a:pt x="75031" y="231286"/>
+                  </a:lnTo>
+                  <a:lnTo>
+                    <a:pt x="146654" y="437437"/>
+                  </a:lnTo>
+                  <a:lnTo>
+                    <a:pt x="218276" y="630521"/>
+                  </a:lnTo>
+                  <a:lnTo>
+                    <a:pt x="289899" y="811367"/>
+                  </a:lnTo>
+                  <a:lnTo>
+                    <a:pt x="361521" y="980750"/>
+                  </a:lnTo>
+                  <a:lnTo>
+                    <a:pt x="433144" y="1139398"/>
+                  </a:lnTo>
+                  <a:lnTo>
+                    <a:pt x="504766" y="1287989"/>
+                  </a:lnTo>
+                  <a:lnTo>
+                    <a:pt x="576389" y="1427163"/>
+                  </a:lnTo>
+                  <a:lnTo>
+                    <a:pt x="648011" y="1557515"/>
+                  </a:lnTo>
+                  <a:lnTo>
+                    <a:pt x="719634" y="1679606"/>
+                  </a:lnTo>
+                  <a:lnTo>
+                    <a:pt x="791257" y="1793957"/>
+                  </a:lnTo>
+                  <a:lnTo>
+                    <a:pt x="862879" y="1901061"/>
+                  </a:lnTo>
+                  <a:lnTo>
+                    <a:pt x="934502" y="2001376"/>
+                  </a:lnTo>
+                  <a:lnTo>
+                    <a:pt x="1006124" y="2095333"/>
+                  </a:lnTo>
+                  <a:lnTo>
+                    <a:pt x="1077747" y="2183335"/>
+                  </a:lnTo>
+                  <a:lnTo>
+                    <a:pt x="1149369" y="2265759"/>
+                  </a:lnTo>
+                  <a:lnTo>
+                    <a:pt x="1220992" y="2342959"/>
+                  </a:lnTo>
+                  <a:lnTo>
+                    <a:pt x="1292614" y="2415265"/>
+                  </a:lnTo>
+                  <a:lnTo>
+                    <a:pt x="1364237" y="2482989"/>
+                  </a:lnTo>
+                  <a:lnTo>
+                    <a:pt x="1435859" y="2546420"/>
+                  </a:lnTo>
+                  <a:lnTo>
+                    <a:pt x="1507482" y="2605830"/>
+                  </a:lnTo>
+                  <a:lnTo>
+                    <a:pt x="1579104" y="2661475"/>
+                  </a:lnTo>
+                  <a:lnTo>
+                    <a:pt x="1650727" y="2713593"/>
+                  </a:lnTo>
+                  <a:lnTo>
+                    <a:pt x="1722349" y="2762408"/>
+                  </a:lnTo>
+                  <a:lnTo>
+                    <a:pt x="1793972" y="2808128"/>
+                  </a:lnTo>
+                  <a:lnTo>
+                    <a:pt x="1865594" y="2850951"/>
+                  </a:lnTo>
+                  <a:lnTo>
+                    <a:pt x="1937217" y="2891059"/>
+                  </a:lnTo>
+                  <a:lnTo>
+                    <a:pt x="2008839" y="2928626"/>
+                  </a:lnTo>
+                  <a:lnTo>
+                    <a:pt x="2080462" y="2963811"/>
+                  </a:lnTo>
+                  <a:lnTo>
+                    <a:pt x="2152085" y="2996766"/>
+                  </a:lnTo>
+                  <a:lnTo>
+                    <a:pt x="2223707" y="3027632"/>
+                  </a:lnTo>
+                  <a:lnTo>
+                    <a:pt x="2295330" y="3056542"/>
+                  </a:lnTo>
+                  <a:lnTo>
+                    <a:pt x="2366952" y="3083620"/>
+                  </a:lnTo>
+                  <a:lnTo>
+                    <a:pt x="2438575" y="3108981"/>
+                  </a:lnTo>
+                  <a:lnTo>
+                    <a:pt x="2510197" y="3132735"/>
+                  </a:lnTo>
+                  <a:lnTo>
+                    <a:pt x="2581820" y="3154983"/>
+                  </a:lnTo>
+                  <a:lnTo>
+                    <a:pt x="2653442" y="3175821"/>
+                  </a:lnTo>
+                  <a:lnTo>
+                    <a:pt x="2725065" y="3195338"/>
+                  </a:lnTo>
+                  <a:lnTo>
+                    <a:pt x="2796687" y="3213618"/>
+                  </a:lnTo>
+                  <a:lnTo>
+                    <a:pt x="2868310" y="3230740"/>
+                  </a:lnTo>
+                  <a:lnTo>
+                    <a:pt x="2939932" y="3246776"/>
+                  </a:lnTo>
+                  <a:lnTo>
+                    <a:pt x="3011555" y="3261796"/>
+                  </a:lnTo>
+                  <a:lnTo>
+                    <a:pt x="3083177" y="3275864"/>
+                  </a:lnTo>
+                  <a:lnTo>
+                    <a:pt x="3154800" y="3289040"/>
+                  </a:lnTo>
+                  <a:lnTo>
+                    <a:pt x="3226422" y="3301381"/>
+                  </a:lnTo>
+                  <a:lnTo>
+                    <a:pt x="3298045" y="3312940"/>
+                  </a:lnTo>
+                  <a:lnTo>
+                    <a:pt x="3369667" y="3323766"/>
+                  </a:lnTo>
+                  <a:lnTo>
+                    <a:pt x="3441290" y="3333906"/>
+                  </a:lnTo>
+                  <a:lnTo>
+                    <a:pt x="3512913" y="3343403"/>
+                  </a:lnTo>
+                  <a:lnTo>
+                    <a:pt x="3584535" y="3352299"/>
+                  </a:lnTo>
+                  <a:lnTo>
+                    <a:pt x="3656158" y="3360630"/>
+                  </a:lnTo>
+                  <a:lnTo>
+                    <a:pt x="3727780" y="3368434"/>
+                  </a:lnTo>
+                  <a:lnTo>
+                    <a:pt x="3799403" y="3375743"/>
+                  </a:lnTo>
+                  <a:lnTo>
+                    <a:pt x="3871025" y="3382588"/>
+                  </a:lnTo>
+                  <a:lnTo>
+                    <a:pt x="3942648" y="3389000"/>
+                  </a:lnTo>
+                  <a:lnTo>
+                    <a:pt x="4014270" y="3395005"/>
+                  </a:lnTo>
+                  <a:lnTo>
+                    <a:pt x="4085893" y="3400630"/>
+                  </a:lnTo>
+                  <a:lnTo>
+                    <a:pt x="4157515" y="3405898"/>
+                  </a:lnTo>
+                  <a:lnTo>
+                    <a:pt x="4229138" y="3410832"/>
+                  </a:lnTo>
+                  <a:lnTo>
+                    <a:pt x="4300760" y="3415454"/>
+                  </a:lnTo>
+                  <a:lnTo>
+                    <a:pt x="4372383" y="3419782"/>
+                  </a:lnTo>
+                  <a:lnTo>
+                    <a:pt x="4444005" y="3423837"/>
+                  </a:lnTo>
+                  <a:lnTo>
+                    <a:pt x="4515628" y="3427634"/>
+                  </a:lnTo>
+                  <a:lnTo>
+                    <a:pt x="4587250" y="3431191"/>
+                  </a:lnTo>
+                  <a:lnTo>
+                    <a:pt x="4658873" y="3434522"/>
+                  </a:lnTo>
+                  <a:lnTo>
+                    <a:pt x="4730495" y="3437642"/>
+                  </a:lnTo>
+                  <a:lnTo>
+                    <a:pt x="4802118" y="3440564"/>
+                  </a:lnTo>
+                  <a:lnTo>
+                    <a:pt x="4873741" y="3443301"/>
+                  </a:lnTo>
+                  <a:lnTo>
+                    <a:pt x="4945363" y="3445865"/>
+                  </a:lnTo>
+                  <a:lnTo>
+                    <a:pt x="5016986" y="3448266"/>
+                  </a:lnTo>
+                  <a:lnTo>
+                    <a:pt x="5088608" y="3450514"/>
+                  </a:lnTo>
+                  <a:lnTo>
+                    <a:pt x="5160231" y="3452621"/>
+                  </a:lnTo>
+                  <a:lnTo>
+                    <a:pt x="5231853" y="3454594"/>
+                  </a:lnTo>
+                  <a:lnTo>
+                    <a:pt x="5303476" y="3456441"/>
+                  </a:lnTo>
+                  <a:lnTo>
+                    <a:pt x="5375098" y="3458172"/>
+                  </a:lnTo>
+                  <a:lnTo>
+                    <a:pt x="5446721" y="3459793"/>
+                  </a:lnTo>
+                  <a:lnTo>
+                    <a:pt x="5518343" y="3461311"/>
                   </a:lnTo>
                 </a:path>
               </a:pathLst>
@@ -4807,7 +4807,7 @@
           </p:nvSpPr>
           <p:spPr>
             <a:xfrm>
-              <a:off x="4313661" y="2073503"/>
+              <a:off x="4313914" y="2073503"/>
               <a:ext cx="0" cy="3649639"/>
             </a:xfrm>
             <a:custGeom>
@@ -5080,7 +5080,7 @@
           </p:nvSpPr>
           <p:spPr>
             <a:xfrm>
-              <a:off x="1343342" y="5785772"/>
+              <a:off x="1344940" y="5785772"/>
               <a:ext cx="161574" cy="80101"/>
             </a:xfrm>
             <a:prstGeom prst="rect">
@@ -5126,7 +5126,7 @@
           </p:nvSpPr>
           <p:spPr>
             <a:xfrm>
-              <a:off x="2280620" y="5785772"/>
+              <a:off x="2281218" y="5785772"/>
               <a:ext cx="161574" cy="80101"/>
             </a:xfrm>
             <a:prstGeom prst="rect">
@@ -5172,7 +5172,7 @@
           </p:nvSpPr>
           <p:spPr>
             <a:xfrm>
-              <a:off x="3217897" y="5785772"/>
+              <a:off x="3217496" y="5785772"/>
               <a:ext cx="161574" cy="80101"/>
             </a:xfrm>
             <a:prstGeom prst="rect">
@@ -5218,7 +5218,7 @@
           </p:nvSpPr>
           <p:spPr>
             <a:xfrm>
-              <a:off x="4204872" y="5785772"/>
+              <a:off x="4203472" y="5785772"/>
               <a:ext cx="62179" cy="80101"/>
             </a:xfrm>
             <a:prstGeom prst="rect">
@@ -5264,7 +5264,7 @@
           </p:nvSpPr>
           <p:spPr>
             <a:xfrm>
-              <a:off x="5111060" y="5785772"/>
+              <a:off x="5108660" y="5785772"/>
               <a:ext cx="124358" cy="80101"/>
             </a:xfrm>
             <a:prstGeom prst="rect">
@@ -5310,7 +5310,7 @@
           </p:nvSpPr>
           <p:spPr>
             <a:xfrm>
-              <a:off x="6048338" y="5785772"/>
+              <a:off x="6044938" y="5785772"/>
               <a:ext cx="124358" cy="80101"/>
             </a:xfrm>
             <a:prstGeom prst="rect">
@@ -5356,7 +5356,7 @@
           </p:nvSpPr>
           <p:spPr>
             <a:xfrm>
-              <a:off x="6985615" y="5785772"/>
+              <a:off x="6981216" y="5785772"/>
               <a:ext cx="124358" cy="80101"/>
             </a:xfrm>
             <a:prstGeom prst="rect">
@@ -5402,7 +5402,7 @@
           </p:nvSpPr>
           <p:spPr>
             <a:xfrm>
-              <a:off x="7922893" y="5785772"/>
+              <a:off x="7917494" y="5785772"/>
               <a:ext cx="124358" cy="80101"/>
             </a:xfrm>
             <a:prstGeom prst="rect">
@@ -5573,7 +5573,7 @@
                   <a:latin typeface="Helvetica"/>
                   <a:cs typeface="Helvetica"/>
                 </a:rPr>
-                <a:t>subHR per 10 % decline: 2.35 (1.32-4.17), p = 0.004  |  per IQR decline (Δ = 25.8 %): 9.10 (2.07-40.10)  |  IQR: [-10.7, 15.1] %</a:t>
+                <a:t>subHR per 10 % decline: 2.35 (1.33-4.17), p = 0.003  |  per IQR decline (Δ = 25.8 %): 9.11 (2.08-39.88)  |  IQR: [-10.6, 15.2] %</a:t>
               </a:r>
             </a:p>
           </p:txBody>
